--- a/docs/pitch/AvtoNazorat-Pitch-EN.pptx
+++ b/docs/pitch/AvtoNazorat-Pitch-EN.pptx
@@ -2224,6 +2224,9 @@
           <a:prstGeom prst="ellipse">
             <a:avLst/>
           </a:prstGeom>
+          <a:solidFill>
+            <a:srgbClr val="0E1729"/>
+          </a:solidFill>
           <a:ln w="19050">
             <a:solidFill>
               <a:srgbClr val="24365A"/>
@@ -2246,6 +2249,9 @@
           <a:prstGeom prst="ellipse">
             <a:avLst/>
           </a:prstGeom>
+          <a:solidFill>
+            <a:srgbClr val="0E1729"/>
+          </a:solidFill>
           <a:ln w="19050">
             <a:solidFill>
               <a:srgbClr val="3563E9"/>
@@ -2271,7 +2277,9 @@
           <a:solidFill>
             <a:srgbClr val="FFB020"/>
           </a:solidFill>
-          <a:ln/>
+          <a:ln>
+            <a:noFill/>
+          </a:ln>
         </p:spPr>
       </p:sp>
       <p:sp>
@@ -2291,7 +2299,9 @@
           <a:solidFill>
             <a:srgbClr val="FFB020"/>
           </a:solidFill>
-          <a:ln/>
+          <a:ln>
+            <a:noFill/>
+          </a:ln>
         </p:spPr>
       </p:sp>
       <p:sp>
@@ -2309,7 +2319,9 @@
             <a:avLst/>
           </a:prstGeom>
           <a:noFill/>
-          <a:ln/>
+          <a:ln>
+            <a:noFill/>
+          </a:ln>
         </p:spPr>
         <p:txBody>
           <a:bodyPr wrap="square" lIns="0" tIns="0" rIns="0" bIns="0" rtlCol="0" anchor="ctr"/>
@@ -2348,7 +2360,9 @@
             <a:avLst/>
           </a:prstGeom>
           <a:noFill/>
-          <a:ln/>
+          <a:ln>
+            <a:noFill/>
+          </a:ln>
         </p:spPr>
         <p:txBody>
           <a:bodyPr wrap="square" lIns="0" tIns="0" rIns="0" bIns="0" rtlCol="0" anchor="ctr"/>
@@ -2387,7 +2401,9 @@
             <a:avLst/>
           </a:prstGeom>
           <a:noFill/>
-          <a:ln/>
+          <a:ln>
+            <a:noFill/>
+          </a:ln>
         </p:spPr>
         <p:txBody>
           <a:bodyPr wrap="square" lIns="0" tIns="0" rIns="0" bIns="0" rtlCol="0" anchor="ctr"/>
@@ -2426,7 +2442,9 @@
             <a:avLst/>
           </a:prstGeom>
           <a:noFill/>
-          <a:ln/>
+          <a:ln>
+            <a:noFill/>
+          </a:ln>
         </p:spPr>
         <p:txBody>
           <a:bodyPr wrap="square" lIns="0" tIns="0" rIns="0" bIns="0" rtlCol="0" anchor="t"/>
@@ -2465,7 +2483,9 @@
             <a:avLst/>
           </a:prstGeom>
           <a:noFill/>
-          <a:ln/>
+          <a:ln>
+            <a:noFill/>
+          </a:ln>
         </p:spPr>
         <p:txBody>
           <a:bodyPr wrap="square" lIns="0" tIns="0" rIns="0" bIns="0" rtlCol="0" anchor="t"/>
@@ -2504,7 +2524,9 @@
             <a:avLst/>
           </a:prstGeom>
           <a:noFill/>
-          <a:ln/>
+          <a:ln>
+            <a:noFill/>
+          </a:ln>
         </p:spPr>
         <p:txBody>
           <a:bodyPr wrap="square" lIns="0" tIns="0" rIns="0" bIns="0" rtlCol="0" anchor="t"/>
@@ -2573,7 +2595,9 @@
             <a:avLst/>
           </a:prstGeom>
           <a:noFill/>
-          <a:ln/>
+          <a:ln>
+            <a:noFill/>
+          </a:ln>
         </p:spPr>
         <p:txBody>
           <a:bodyPr wrap="square" lIns="0" tIns="0" rIns="0" bIns="0" rtlCol="0" anchor="ctr"/>
@@ -2639,7 +2663,9 @@
             <a:avLst/>
           </a:prstGeom>
           <a:noFill/>
-          <a:ln/>
+          <a:ln>
+            <a:noFill/>
+          </a:ln>
         </p:spPr>
         <p:txBody>
           <a:bodyPr wrap="square" lIns="0" tIns="0" rIns="0" bIns="0" rtlCol="0" anchor="ctr"/>
@@ -2705,7 +2731,9 @@
             <a:avLst/>
           </a:prstGeom>
           <a:noFill/>
-          <a:ln/>
+          <a:ln>
+            <a:noFill/>
+          </a:ln>
         </p:spPr>
         <p:txBody>
           <a:bodyPr wrap="square" lIns="0" tIns="0" rIns="0" bIns="0" rtlCol="0" anchor="ctr"/>
@@ -2771,7 +2799,9 @@
             <a:avLst/>
           </a:prstGeom>
           <a:noFill/>
-          <a:ln/>
+          <a:ln>
+            <a:noFill/>
+          </a:ln>
         </p:spPr>
         <p:txBody>
           <a:bodyPr wrap="square" lIns="0" tIns="0" rIns="0" bIns="0" rtlCol="0" anchor="ctr"/>
@@ -2810,7 +2840,9 @@
             <a:avLst/>
           </a:prstGeom>
           <a:noFill/>
-          <a:ln/>
+          <a:ln>
+            <a:noFill/>
+          </a:ln>
         </p:spPr>
         <p:txBody>
           <a:bodyPr wrap="square" lIns="0" tIns="0" rIns="0" bIns="0" rtlCol="0" anchor="ctr"/>
@@ -2874,7 +2906,9 @@
             <a:avLst/>
           </a:prstGeom>
           <a:noFill/>
-          <a:ln/>
+          <a:ln>
+            <a:noFill/>
+          </a:ln>
         </p:spPr>
         <p:txBody>
           <a:bodyPr wrap="square" lIns="0" tIns="0" rIns="0" bIns="0" rtlCol="0" anchor="ctr"/>
@@ -2913,7 +2947,9 @@
             <a:avLst/>
           </a:prstGeom>
           <a:noFill/>
-          <a:ln/>
+          <a:ln>
+            <a:noFill/>
+          </a:ln>
         </p:spPr>
         <p:txBody>
           <a:bodyPr wrap="square" lIns="0" tIns="0" rIns="0" bIns="0" rtlCol="0" anchor="t"/>
@@ -2981,7 +3017,9 @@
           <a:solidFill>
             <a:srgbClr val="FFB020"/>
           </a:solidFill>
-          <a:ln/>
+          <a:ln>
+            <a:noFill/>
+          </a:ln>
         </p:spPr>
       </p:sp>
       <p:sp>
@@ -2999,7 +3037,9 @@
             <a:avLst/>
           </a:prstGeom>
           <a:noFill/>
-          <a:ln/>
+          <a:ln>
+            <a:noFill/>
+          </a:ln>
         </p:spPr>
         <p:txBody>
           <a:bodyPr wrap="square" lIns="0" tIns="0" rIns="0" bIns="0" rtlCol="0" anchor="ctr"/>
@@ -3038,7 +3078,9 @@
             <a:avLst/>
           </a:prstGeom>
           <a:noFill/>
-          <a:ln/>
+          <a:ln>
+            <a:noFill/>
+          </a:ln>
         </p:spPr>
         <p:txBody>
           <a:bodyPr wrap="square" lIns="0" tIns="0" rIns="0" bIns="0" rtlCol="0" anchor="t"/>
@@ -3109,7 +3151,9 @@
           <a:solidFill>
             <a:srgbClr val="FFB020"/>
           </a:solidFill>
-          <a:ln/>
+          <a:ln>
+            <a:noFill/>
+          </a:ln>
         </p:spPr>
       </p:sp>
       <p:sp>
@@ -3127,7 +3171,9 @@
             <a:avLst/>
           </a:prstGeom>
           <a:noFill/>
-          <a:ln/>
+          <a:ln>
+            <a:noFill/>
+          </a:ln>
         </p:spPr>
         <p:txBody>
           <a:bodyPr wrap="square" lIns="0" tIns="0" rIns="0" bIns="0" rtlCol="0" anchor="ctr"/>
@@ -3166,7 +3212,9 @@
             <a:avLst/>
           </a:prstGeom>
           <a:noFill/>
-          <a:ln/>
+          <a:ln>
+            <a:noFill/>
+          </a:ln>
         </p:spPr>
         <p:txBody>
           <a:bodyPr wrap="square" lIns="0" tIns="0" rIns="0" bIns="0" rtlCol="0" anchor="t"/>
@@ -3237,7 +3285,9 @@
           <a:solidFill>
             <a:srgbClr val="FFB020"/>
           </a:solidFill>
-          <a:ln/>
+          <a:ln>
+            <a:noFill/>
+          </a:ln>
         </p:spPr>
       </p:sp>
       <p:sp>
@@ -3255,7 +3305,9 @@
             <a:avLst/>
           </a:prstGeom>
           <a:noFill/>
-          <a:ln/>
+          <a:ln>
+            <a:noFill/>
+          </a:ln>
         </p:spPr>
         <p:txBody>
           <a:bodyPr wrap="square" lIns="0" tIns="0" rIns="0" bIns="0" rtlCol="0" anchor="ctr"/>
@@ -3294,7 +3346,9 @@
             <a:avLst/>
           </a:prstGeom>
           <a:noFill/>
-          <a:ln/>
+          <a:ln>
+            <a:noFill/>
+          </a:ln>
         </p:spPr>
         <p:txBody>
           <a:bodyPr wrap="square" lIns="0" tIns="0" rIns="0" bIns="0" rtlCol="0" anchor="t"/>
@@ -3365,7 +3419,9 @@
           <a:solidFill>
             <a:srgbClr val="FFB020"/>
           </a:solidFill>
-          <a:ln/>
+          <a:ln>
+            <a:noFill/>
+          </a:ln>
         </p:spPr>
       </p:sp>
       <p:sp>
@@ -3383,7 +3439,9 @@
             <a:avLst/>
           </a:prstGeom>
           <a:noFill/>
-          <a:ln/>
+          <a:ln>
+            <a:noFill/>
+          </a:ln>
         </p:spPr>
         <p:txBody>
           <a:bodyPr wrap="square" lIns="0" tIns="0" rIns="0" bIns="0" rtlCol="0" anchor="ctr"/>
@@ -3422,7 +3480,9 @@
             <a:avLst/>
           </a:prstGeom>
           <a:noFill/>
-          <a:ln/>
+          <a:ln>
+            <a:noFill/>
+          </a:ln>
         </p:spPr>
         <p:txBody>
           <a:bodyPr wrap="square" lIns="0" tIns="0" rIns="0" bIns="0" rtlCol="0" anchor="t"/>
@@ -3493,7 +3553,9 @@
           <a:solidFill>
             <a:srgbClr val="FFB020"/>
           </a:solidFill>
-          <a:ln/>
+          <a:ln>
+            <a:noFill/>
+          </a:ln>
         </p:spPr>
       </p:sp>
       <p:sp>
@@ -3511,7 +3573,9 @@
             <a:avLst/>
           </a:prstGeom>
           <a:noFill/>
-          <a:ln/>
+          <a:ln>
+            <a:noFill/>
+          </a:ln>
         </p:spPr>
         <p:txBody>
           <a:bodyPr wrap="square" lIns="0" tIns="0" rIns="0" bIns="0" rtlCol="0" anchor="ctr"/>
@@ -3550,7 +3614,9 @@
             <a:avLst/>
           </a:prstGeom>
           <a:noFill/>
-          <a:ln/>
+          <a:ln>
+            <a:noFill/>
+          </a:ln>
         </p:spPr>
         <p:txBody>
           <a:bodyPr wrap="square" lIns="0" tIns="0" rIns="0" bIns="0" rtlCol="0" anchor="t"/>
@@ -3621,7 +3687,9 @@
           <a:solidFill>
             <a:srgbClr val="FFB020"/>
           </a:solidFill>
-          <a:ln/>
+          <a:ln>
+            <a:noFill/>
+          </a:ln>
         </p:spPr>
       </p:sp>
       <p:sp>
@@ -3639,7 +3707,9 @@
             <a:avLst/>
           </a:prstGeom>
           <a:noFill/>
-          <a:ln/>
+          <a:ln>
+            <a:noFill/>
+          </a:ln>
         </p:spPr>
         <p:txBody>
           <a:bodyPr wrap="square" lIns="0" tIns="0" rIns="0" bIns="0" rtlCol="0" anchor="ctr"/>
@@ -3678,7 +3748,9 @@
             <a:avLst/>
           </a:prstGeom>
           <a:noFill/>
-          <a:ln/>
+          <a:ln>
+            <a:noFill/>
+          </a:ln>
         </p:spPr>
         <p:txBody>
           <a:bodyPr wrap="square" lIns="0" tIns="0" rIns="0" bIns="0" rtlCol="0" anchor="t"/>
@@ -3745,7 +3817,9 @@
             <a:avLst/>
           </a:prstGeom>
           <a:noFill/>
-          <a:ln/>
+          <a:ln>
+            <a:noFill/>
+          </a:ln>
         </p:spPr>
         <p:txBody>
           <a:bodyPr wrap="square" lIns="0" tIns="0" rIns="0" bIns="0" rtlCol="0" anchor="ctr"/>
@@ -3784,7 +3858,9 @@
             <a:avLst/>
           </a:prstGeom>
           <a:noFill/>
-          <a:ln/>
+          <a:ln>
+            <a:noFill/>
+          </a:ln>
         </p:spPr>
         <p:txBody>
           <a:bodyPr wrap="square" lIns="0" tIns="0" rIns="0" bIns="0" rtlCol="0" anchor="t"/>
@@ -3827,7 +3903,9 @@
           <a:solidFill>
             <a:srgbClr val="0E1729"/>
           </a:solidFill>
-          <a:ln/>
+          <a:ln>
+            <a:noFill/>
+          </a:ln>
         </p:spPr>
       </p:sp>
       <p:sp>
@@ -3845,7 +3923,9 @@
             <a:avLst/>
           </a:prstGeom>
           <a:noFill/>
-          <a:ln/>
+          <a:ln>
+            <a:noFill/>
+          </a:ln>
         </p:spPr>
         <p:txBody>
           <a:bodyPr wrap="square" lIns="0" tIns="0" rIns="0" bIns="0" rtlCol="0" anchor="ctr"/>
@@ -3884,7 +3964,9 @@
             <a:avLst/>
           </a:prstGeom>
           <a:noFill/>
-          <a:ln/>
+          <a:ln>
+            <a:noFill/>
+          </a:ln>
         </p:spPr>
         <p:txBody>
           <a:bodyPr wrap="square" lIns="0" tIns="0" rIns="0" bIns="0" rtlCol="0" anchor="t"/>
@@ -3930,7 +4012,9 @@
           <a:solidFill>
             <a:srgbClr val="0E1729"/>
           </a:solidFill>
-          <a:ln/>
+          <a:ln>
+            <a:noFill/>
+          </a:ln>
         </p:spPr>
       </p:sp>
       <p:sp>
@@ -3948,7 +4032,9 @@
             <a:avLst/>
           </a:prstGeom>
           <a:noFill/>
-          <a:ln/>
+          <a:ln>
+            <a:noFill/>
+          </a:ln>
         </p:spPr>
         <p:txBody>
           <a:bodyPr wrap="square" lIns="0" tIns="0" rIns="0" bIns="0" rtlCol="0" anchor="ctr"/>
@@ -3987,7 +4073,9 @@
             <a:avLst/>
           </a:prstGeom>
           <a:noFill/>
-          <a:ln/>
+          <a:ln>
+            <a:noFill/>
+          </a:ln>
         </p:spPr>
         <p:txBody>
           <a:bodyPr wrap="square" lIns="0" tIns="0" rIns="0" bIns="0" rtlCol="0" anchor="t"/>
@@ -4033,7 +4121,9 @@
           <a:solidFill>
             <a:srgbClr val="0E1729"/>
           </a:solidFill>
-          <a:ln/>
+          <a:ln>
+            <a:noFill/>
+          </a:ln>
         </p:spPr>
       </p:sp>
       <p:sp>
@@ -4051,7 +4141,9 @@
             <a:avLst/>
           </a:prstGeom>
           <a:noFill/>
-          <a:ln/>
+          <a:ln>
+            <a:noFill/>
+          </a:ln>
         </p:spPr>
         <p:txBody>
           <a:bodyPr wrap="square" lIns="0" tIns="0" rIns="0" bIns="0" rtlCol="0" anchor="ctr"/>
@@ -4090,7 +4182,9 @@
             <a:avLst/>
           </a:prstGeom>
           <a:noFill/>
-          <a:ln/>
+          <a:ln>
+            <a:noFill/>
+          </a:ln>
         </p:spPr>
         <p:txBody>
           <a:bodyPr wrap="square" lIns="0" tIns="0" rIns="0" bIns="0" rtlCol="0" anchor="t"/>
@@ -4159,7 +4253,9 @@
             <a:avLst/>
           </a:prstGeom>
           <a:noFill/>
-          <a:ln/>
+          <a:ln>
+            <a:noFill/>
+          </a:ln>
         </p:spPr>
         <p:txBody>
           <a:bodyPr wrap="square" lIns="0" tIns="0" rIns="0" bIns="0" rtlCol="0" anchor="ctr"/>
@@ -4198,7 +4294,9 @@
             <a:avLst/>
           </a:prstGeom>
           <a:noFill/>
-          <a:ln/>
+          <a:ln>
+            <a:noFill/>
+          </a:ln>
         </p:spPr>
         <p:txBody>
           <a:bodyPr wrap="square" lIns="0" tIns="0" rIns="0" bIns="0" rtlCol="0" anchor="t"/>
@@ -4267,7 +4365,9 @@
             <a:avLst/>
           </a:prstGeom>
           <a:noFill/>
-          <a:ln/>
+          <a:ln>
+            <a:noFill/>
+          </a:ln>
         </p:spPr>
         <p:txBody>
           <a:bodyPr wrap="square" lIns="0" tIns="0" rIns="0" bIns="0" rtlCol="0" anchor="ctr"/>
@@ -4306,7 +4406,9 @@
             <a:avLst/>
           </a:prstGeom>
           <a:noFill/>
-          <a:ln/>
+          <a:ln>
+            <a:noFill/>
+          </a:ln>
         </p:spPr>
         <p:txBody>
           <a:bodyPr wrap="square" lIns="0" tIns="0" rIns="0" bIns="0" rtlCol="0" anchor="t"/>
@@ -4375,7 +4477,9 @@
             <a:avLst/>
           </a:prstGeom>
           <a:noFill/>
-          <a:ln/>
+          <a:ln>
+            <a:noFill/>
+          </a:ln>
         </p:spPr>
         <p:txBody>
           <a:bodyPr wrap="square" lIns="0" tIns="0" rIns="0" bIns="0" rtlCol="0" anchor="ctr"/>
@@ -4414,7 +4518,9 @@
             <a:avLst/>
           </a:prstGeom>
           <a:noFill/>
-          <a:ln/>
+          <a:ln>
+            <a:noFill/>
+          </a:ln>
         </p:spPr>
         <p:txBody>
           <a:bodyPr wrap="square" lIns="0" tIns="0" rIns="0" bIns="0" rtlCol="0" anchor="ctr"/>
@@ -4453,7 +4559,9 @@
             <a:avLst/>
           </a:prstGeom>
           <a:noFill/>
-          <a:ln/>
+          <a:ln>
+            <a:noFill/>
+          </a:ln>
         </p:spPr>
         <p:txBody>
           <a:bodyPr wrap="square" lIns="0" tIns="0" rIns="0" bIns="0" rtlCol="0" anchor="t"/>
@@ -4520,7 +4628,9 @@
             <a:avLst/>
           </a:prstGeom>
           <a:noFill/>
-          <a:ln/>
+          <a:ln>
+            <a:noFill/>
+          </a:ln>
         </p:spPr>
         <p:txBody>
           <a:bodyPr wrap="square" lIns="0" tIns="0" rIns="0" bIns="0" rtlCol="0" anchor="ctr"/>
@@ -4559,7 +4669,9 @@
             <a:avLst/>
           </a:prstGeom>
           <a:noFill/>
-          <a:ln/>
+          <a:ln>
+            <a:noFill/>
+          </a:ln>
         </p:spPr>
         <p:txBody>
           <a:bodyPr wrap="square" lIns="0" tIns="0" rIns="0" bIns="0" rtlCol="0" anchor="t"/>
@@ -4625,7 +4737,9 @@
             <a:avLst/>
           </a:prstGeom>
           <a:noFill/>
-          <a:ln/>
+          <a:ln>
+            <a:noFill/>
+          </a:ln>
         </p:spPr>
         <p:txBody>
           <a:bodyPr wrap="square" lIns="0" tIns="0" rIns="0" bIns="0" rtlCol="0" anchor="ctr"/>
@@ -4664,7 +4778,9 @@
             <a:avLst/>
           </a:prstGeom>
           <a:noFill/>
-          <a:ln/>
+          <a:ln>
+            <a:noFill/>
+          </a:ln>
         </p:spPr>
         <p:txBody>
           <a:bodyPr wrap="square" lIns="0" tIns="0" rIns="0" bIns="0" rtlCol="0" anchor="t"/>
@@ -4786,7 +4902,9 @@
           <a:solidFill>
             <a:srgbClr val="0E1729"/>
           </a:solidFill>
-          <a:ln/>
+          <a:ln>
+            <a:noFill/>
+          </a:ln>
         </p:spPr>
       </p:sp>
       <p:sp>
@@ -4808,7 +4926,9 @@
           <a:solidFill>
             <a:srgbClr val="FFB020"/>
           </a:solidFill>
-          <a:ln/>
+          <a:ln>
+            <a:noFill/>
+          </a:ln>
         </p:spPr>
       </p:sp>
       <p:sp>
@@ -4826,7 +4946,9 @@
             <a:avLst/>
           </a:prstGeom>
           <a:noFill/>
-          <a:ln/>
+          <a:ln>
+            <a:noFill/>
+          </a:ln>
         </p:spPr>
         <p:txBody>
           <a:bodyPr wrap="square" lIns="0" tIns="0" rIns="0" bIns="0" rtlCol="0" anchor="ctr"/>
@@ -4865,7 +4987,9 @@
             <a:avLst/>
           </a:prstGeom>
           <a:noFill/>
-          <a:ln/>
+          <a:ln>
+            <a:noFill/>
+          </a:ln>
         </p:spPr>
         <p:txBody>
           <a:bodyPr wrap="square" lIns="0" tIns="0" rIns="0" bIns="0" rtlCol="0" anchor="ctr"/>
@@ -4904,7 +5028,9 @@
             <a:avLst/>
           </a:prstGeom>
           <a:noFill/>
-          <a:ln/>
+          <a:ln>
+            <a:noFill/>
+          </a:ln>
         </p:spPr>
         <p:txBody>
           <a:bodyPr wrap="square" lIns="0" tIns="0" rIns="0" bIns="0" rtlCol="0" anchor="t"/>
@@ -5049,7 +5175,9 @@
             <a:avLst/>
           </a:prstGeom>
           <a:noFill/>
-          <a:ln/>
+          <a:ln>
+            <a:noFill/>
+          </a:ln>
         </p:spPr>
         <p:txBody>
           <a:bodyPr wrap="square" lIns="0" tIns="0" rIns="0" bIns="0" rtlCol="0" anchor="ctr"/>
@@ -5088,7 +5216,9 @@
             <a:avLst/>
           </a:prstGeom>
           <a:noFill/>
-          <a:ln/>
+          <a:ln>
+            <a:noFill/>
+          </a:ln>
         </p:spPr>
         <p:txBody>
           <a:bodyPr wrap="square" lIns="0" tIns="0" rIns="0" bIns="0" rtlCol="0" anchor="t"/>
@@ -5206,7 +5336,9 @@
             <a:avLst/>
           </a:prstGeom>
           <a:noFill/>
-          <a:ln/>
+          <a:ln>
+            <a:noFill/>
+          </a:ln>
         </p:spPr>
         <p:txBody>
           <a:bodyPr wrap="square" lIns="0" tIns="0" rIns="0" bIns="0" rtlCol="0" anchor="t"/>
@@ -5275,7 +5407,9 @@
             <a:avLst/>
           </a:prstGeom>
           <a:noFill/>
-          <a:ln/>
+          <a:ln>
+            <a:noFill/>
+          </a:ln>
         </p:spPr>
         <p:txBody>
           <a:bodyPr wrap="square" lIns="0" tIns="0" rIns="0" bIns="0" rtlCol="0" anchor="ctr"/>
@@ -5339,7 +5473,9 @@
             <a:avLst/>
           </a:prstGeom>
           <a:noFill/>
-          <a:ln/>
+          <a:ln>
+            <a:noFill/>
+          </a:ln>
         </p:spPr>
         <p:txBody>
           <a:bodyPr wrap="square" lIns="0" tIns="0" rIns="0" bIns="0" rtlCol="0" anchor="ctr"/>
@@ -5378,7 +5514,9 @@
             <a:avLst/>
           </a:prstGeom>
           <a:noFill/>
-          <a:ln/>
+          <a:ln>
+            <a:noFill/>
+          </a:ln>
         </p:spPr>
         <p:txBody>
           <a:bodyPr wrap="square" lIns="0" tIns="0" rIns="0" bIns="0" rtlCol="0" anchor="t"/>
@@ -5417,7 +5555,9 @@
             <a:avLst/>
           </a:prstGeom>
           <a:noFill/>
-          <a:ln/>
+          <a:ln>
+            <a:noFill/>
+          </a:ln>
         </p:spPr>
         <p:txBody>
           <a:bodyPr wrap="square" lIns="0" tIns="0" rIns="0" bIns="0" rtlCol="0" anchor="t"/>
@@ -5486,7 +5626,9 @@
             <a:avLst/>
           </a:prstGeom>
           <a:noFill/>
-          <a:ln/>
+          <a:ln>
+            <a:noFill/>
+          </a:ln>
         </p:spPr>
         <p:txBody>
           <a:bodyPr wrap="square" lIns="0" tIns="0" rIns="0" bIns="0" rtlCol="0" anchor="t"/>
@@ -5528,7 +5670,9 @@
             <a:avLst/>
           </a:prstGeom>
           <a:noFill/>
-          <a:ln/>
+          <a:ln>
+            <a:noFill/>
+          </a:ln>
         </p:spPr>
         <p:txBody>
           <a:bodyPr wrap="square" lIns="0" tIns="0" rIns="0" bIns="0" rtlCol="0" anchor="ctr"/>
@@ -5594,7 +5738,9 @@
             <a:avLst/>
           </a:prstGeom>
           <a:noFill/>
-          <a:ln/>
+          <a:ln>
+            <a:noFill/>
+          </a:ln>
         </p:spPr>
         <p:txBody>
           <a:bodyPr wrap="square" lIns="0" tIns="0" rIns="0" bIns="0" rtlCol="0" anchor="t"/>
@@ -5636,7 +5782,9 @@
             <a:avLst/>
           </a:prstGeom>
           <a:noFill/>
-          <a:ln/>
+          <a:ln>
+            <a:noFill/>
+          </a:ln>
         </p:spPr>
         <p:txBody>
           <a:bodyPr wrap="square" lIns="0" tIns="0" rIns="0" bIns="0" rtlCol="0" anchor="ctr"/>
@@ -5702,7 +5850,9 @@
             <a:avLst/>
           </a:prstGeom>
           <a:noFill/>
-          <a:ln/>
+          <a:ln>
+            <a:noFill/>
+          </a:ln>
         </p:spPr>
         <p:txBody>
           <a:bodyPr wrap="square" lIns="0" tIns="0" rIns="0" bIns="0" rtlCol="0" anchor="t"/>
@@ -5744,7 +5894,9 @@
             <a:avLst/>
           </a:prstGeom>
           <a:noFill/>
-          <a:ln/>
+          <a:ln>
+            <a:noFill/>
+          </a:ln>
         </p:spPr>
         <p:txBody>
           <a:bodyPr wrap="square" lIns="0" tIns="0" rIns="0" bIns="0" rtlCol="0" anchor="ctr"/>
@@ -5810,7 +5962,9 @@
             <a:avLst/>
           </a:prstGeom>
           <a:noFill/>
-          <a:ln/>
+          <a:ln>
+            <a:noFill/>
+          </a:ln>
         </p:spPr>
         <p:txBody>
           <a:bodyPr wrap="square" lIns="0" tIns="0" rIns="0" bIns="0" rtlCol="0" anchor="t"/>
@@ -5852,7 +6006,9 @@
             <a:avLst/>
           </a:prstGeom>
           <a:noFill/>
-          <a:ln/>
+          <a:ln>
+            <a:noFill/>
+          </a:ln>
         </p:spPr>
         <p:txBody>
           <a:bodyPr wrap="square" lIns="0" tIns="0" rIns="0" bIns="0" rtlCol="0" anchor="ctr"/>
@@ -5918,7 +6074,9 @@
             <a:avLst/>
           </a:prstGeom>
           <a:noFill/>
-          <a:ln/>
+          <a:ln>
+            <a:noFill/>
+          </a:ln>
         </p:spPr>
         <p:txBody>
           <a:bodyPr wrap="square" lIns="0" tIns="0" rIns="0" bIns="0" rtlCol="0" anchor="t"/>
@@ -5960,7 +6118,9 @@
             <a:avLst/>
           </a:prstGeom>
           <a:noFill/>
-          <a:ln/>
+          <a:ln>
+            <a:noFill/>
+          </a:ln>
         </p:spPr>
         <p:txBody>
           <a:bodyPr wrap="square" lIns="0" tIns="0" rIns="0" bIns="0" rtlCol="0" anchor="ctr"/>
@@ -6026,7 +6186,9 @@
             <a:avLst/>
           </a:prstGeom>
           <a:noFill/>
-          <a:ln/>
+          <a:ln>
+            <a:noFill/>
+          </a:ln>
         </p:spPr>
         <p:txBody>
           <a:bodyPr wrap="square" lIns="0" tIns="0" rIns="0" bIns="0" rtlCol="0" anchor="t"/>
@@ -6068,7 +6230,9 @@
             <a:avLst/>
           </a:prstGeom>
           <a:noFill/>
-          <a:ln/>
+          <a:ln>
+            <a:noFill/>
+          </a:ln>
         </p:spPr>
         <p:txBody>
           <a:bodyPr wrap="square" lIns="0" tIns="0" rIns="0" bIns="0" rtlCol="0" anchor="ctr"/>
@@ -6111,7 +6275,9 @@
           <a:solidFill>
             <a:srgbClr val="0E1729"/>
           </a:solidFill>
-          <a:ln/>
+          <a:ln>
+            <a:noFill/>
+          </a:ln>
         </p:spPr>
       </p:sp>
       <p:sp>
@@ -6131,7 +6297,9 @@
           <a:solidFill>
             <a:srgbClr val="FFB020"/>
           </a:solidFill>
-          <a:ln/>
+          <a:ln>
+            <a:noFill/>
+          </a:ln>
         </p:spPr>
       </p:sp>
       <p:sp>
@@ -6149,7 +6317,9 @@
             <a:avLst/>
           </a:prstGeom>
           <a:noFill/>
-          <a:ln/>
+          <a:ln>
+            <a:noFill/>
+          </a:ln>
         </p:spPr>
         <p:txBody>
           <a:bodyPr wrap="square" lIns="0" tIns="0" rIns="0" bIns="0" rtlCol="0" anchor="ctr"/>
@@ -6216,7 +6386,9 @@
             <a:avLst/>
           </a:prstGeom>
           <a:noFill/>
-          <a:ln/>
+          <a:ln>
+            <a:noFill/>
+          </a:ln>
         </p:spPr>
         <p:txBody>
           <a:bodyPr wrap="square" lIns="0" tIns="0" rIns="0" bIns="0" rtlCol="0" anchor="ctr"/>
@@ -6255,7 +6427,9 @@
             <a:avLst/>
           </a:prstGeom>
           <a:noFill/>
-          <a:ln/>
+          <a:ln>
+            <a:noFill/>
+          </a:ln>
         </p:spPr>
         <p:txBody>
           <a:bodyPr wrap="square" lIns="0" tIns="0" rIns="0" bIns="0" rtlCol="0" anchor="t"/>
@@ -6287,18 +6461,20 @@
         </p:nvSpPr>
         <p:spPr>
           <a:xfrm>
-            <a:off x="548640" y="1572768"/>
-            <a:ext cx="3484778" cy="4023360"/>
+            <a:off x="548640" y="1627632"/>
+            <a:ext cx="3484778" cy="3200400"/>
           </a:xfrm>
           <a:prstGeom prst="roundRect">
             <a:avLst>
-              <a:gd name="adj" fmla="val 3149"/>
+              <a:gd name="adj" fmla="val 3429"/>
             </a:avLst>
           </a:prstGeom>
           <a:solidFill>
             <a:srgbClr val="0E1729"/>
           </a:solidFill>
-          <a:ln/>
+          <a:ln>
+            <a:noFill/>
+          </a:ln>
         </p:spPr>
       </p:sp>
       <p:sp>
@@ -6309,7 +6485,7 @@
         </p:nvSpPr>
         <p:spPr>
           <a:xfrm>
-            <a:off x="822960" y="1847088"/>
+            <a:off x="822960" y="1901952"/>
             <a:ext cx="365760" cy="365760"/>
           </a:xfrm>
           <a:prstGeom prst="ellipse">
@@ -6318,7 +6494,9 @@
           <a:solidFill>
             <a:srgbClr val="FFB020"/>
           </a:solidFill>
-          <a:ln/>
+          <a:ln>
+            <a:noFill/>
+          </a:ln>
         </p:spPr>
       </p:sp>
       <p:sp>
@@ -6329,14 +6507,16 @@
         </p:nvSpPr>
         <p:spPr>
           <a:xfrm>
-            <a:off x="822960" y="1847088"/>
+            <a:off x="822960" y="1901952"/>
             <a:ext cx="365760" cy="365760"/>
           </a:xfrm>
           <a:prstGeom prst="rect">
             <a:avLst/>
           </a:prstGeom>
           <a:noFill/>
-          <a:ln/>
+          <a:ln>
+            <a:noFill/>
+          </a:ln>
         </p:spPr>
         <p:txBody>
           <a:bodyPr wrap="square" lIns="0" tIns="0" rIns="0" bIns="0" rtlCol="0" anchor="ctr"/>
@@ -6368,14 +6548,16 @@
         </p:nvSpPr>
         <p:spPr>
           <a:xfrm>
-            <a:off x="1280160" y="1828800"/>
+            <a:off x="1280160" y="1883664"/>
             <a:ext cx="2478938" cy="402336"/>
           </a:xfrm>
           <a:prstGeom prst="rect">
             <a:avLst/>
           </a:prstGeom>
           <a:noFill/>
-          <a:ln/>
+          <a:ln>
+            <a:noFill/>
+          </a:ln>
         </p:spPr>
         <p:txBody>
           <a:bodyPr wrap="square" lIns="0" tIns="0" rIns="0" bIns="0" rtlCol="0" anchor="ctr"/>
@@ -6407,14 +6589,16 @@
         </p:nvSpPr>
         <p:spPr>
           <a:xfrm>
-            <a:off x="822960" y="2487168"/>
-            <a:ext cx="2936138" cy="2834640"/>
-          </a:xfrm>
-          <a:prstGeom prst="rect">
-            <a:avLst/>
-          </a:prstGeom>
-          <a:noFill/>
-          <a:ln/>
+            <a:off x="822960" y="2542032"/>
+            <a:ext cx="2936138" cy="2011680"/>
+          </a:xfrm>
+          <a:prstGeom prst="rect">
+            <a:avLst/>
+          </a:prstGeom>
+          <a:noFill/>
+          <a:ln>
+            <a:noFill/>
+          </a:ln>
         </p:spPr>
         <p:txBody>
           <a:bodyPr wrap="square" lIns="0" tIns="0" rIns="0" bIns="0" rtlCol="0" anchor="t"/>
@@ -6501,12 +6685,12 @@
         </p:nvSpPr>
         <p:spPr>
           <a:xfrm>
-            <a:off x="4353458" y="1572768"/>
-            <a:ext cx="3484778" cy="4023360"/>
+            <a:off x="4353458" y="1627632"/>
+            <a:ext cx="3484778" cy="3200400"/>
           </a:xfrm>
           <a:prstGeom prst="roundRect">
             <a:avLst>
-              <a:gd name="adj" fmla="val 3149"/>
+              <a:gd name="adj" fmla="val 3429"/>
             </a:avLst>
           </a:prstGeom>
           <a:solidFill>
@@ -6528,7 +6712,7 @@
         </p:nvSpPr>
         <p:spPr>
           <a:xfrm>
-            <a:off x="4627778" y="1847088"/>
+            <a:off x="4627778" y="1901952"/>
             <a:ext cx="365760" cy="365760"/>
           </a:xfrm>
           <a:prstGeom prst="ellipse">
@@ -6537,7 +6721,9 @@
           <a:solidFill>
             <a:srgbClr val="FFB020"/>
           </a:solidFill>
-          <a:ln/>
+          <a:ln>
+            <a:noFill/>
+          </a:ln>
         </p:spPr>
       </p:sp>
       <p:sp>
@@ -6548,14 +6734,16 @@
         </p:nvSpPr>
         <p:spPr>
           <a:xfrm>
-            <a:off x="4627778" y="1847088"/>
+            <a:off x="4627778" y="1901952"/>
             <a:ext cx="365760" cy="365760"/>
           </a:xfrm>
           <a:prstGeom prst="rect">
             <a:avLst/>
           </a:prstGeom>
           <a:noFill/>
-          <a:ln/>
+          <a:ln>
+            <a:noFill/>
+          </a:ln>
         </p:spPr>
         <p:txBody>
           <a:bodyPr wrap="square" lIns="0" tIns="0" rIns="0" bIns="0" rtlCol="0" anchor="ctr"/>
@@ -6587,14 +6775,16 @@
         </p:nvSpPr>
         <p:spPr>
           <a:xfrm>
-            <a:off x="5084978" y="1828800"/>
+            <a:off x="5084978" y="1883664"/>
             <a:ext cx="2478938" cy="402336"/>
           </a:xfrm>
           <a:prstGeom prst="rect">
             <a:avLst/>
           </a:prstGeom>
           <a:noFill/>
-          <a:ln/>
+          <a:ln>
+            <a:noFill/>
+          </a:ln>
         </p:spPr>
         <p:txBody>
           <a:bodyPr wrap="square" lIns="0" tIns="0" rIns="0" bIns="0" rtlCol="0" anchor="ctr"/>
@@ -6626,14 +6816,16 @@
         </p:nvSpPr>
         <p:spPr>
           <a:xfrm>
-            <a:off x="4627778" y="2487168"/>
-            <a:ext cx="2936138" cy="2834640"/>
-          </a:xfrm>
-          <a:prstGeom prst="rect">
-            <a:avLst/>
-          </a:prstGeom>
-          <a:noFill/>
-          <a:ln/>
+            <a:off x="4627778" y="2542032"/>
+            <a:ext cx="2936138" cy="2011680"/>
+          </a:xfrm>
+          <a:prstGeom prst="rect">
+            <a:avLst/>
+          </a:prstGeom>
+          <a:noFill/>
+          <a:ln>
+            <a:noFill/>
+          </a:ln>
         </p:spPr>
         <p:txBody>
           <a:bodyPr wrap="square" lIns="0" tIns="0" rIns="0" bIns="0" rtlCol="0" anchor="t"/>
@@ -6720,12 +6912,12 @@
         </p:nvSpPr>
         <p:spPr>
           <a:xfrm>
-            <a:off x="8158277" y="1572768"/>
-            <a:ext cx="3484778" cy="4023360"/>
+            <a:off x="8158277" y="1627632"/>
+            <a:ext cx="3484778" cy="3200400"/>
           </a:xfrm>
           <a:prstGeom prst="roundRect">
             <a:avLst>
-              <a:gd name="adj" fmla="val 3149"/>
+              <a:gd name="adj" fmla="val 3429"/>
             </a:avLst>
           </a:prstGeom>
           <a:solidFill>
@@ -6747,7 +6939,7 @@
         </p:nvSpPr>
         <p:spPr>
           <a:xfrm>
-            <a:off x="8432597" y="1847088"/>
+            <a:off x="8432597" y="1901952"/>
             <a:ext cx="365760" cy="365760"/>
           </a:xfrm>
           <a:prstGeom prst="ellipse">
@@ -6756,7 +6948,9 @@
           <a:solidFill>
             <a:srgbClr val="FFB020"/>
           </a:solidFill>
-          <a:ln/>
+          <a:ln>
+            <a:noFill/>
+          </a:ln>
         </p:spPr>
       </p:sp>
       <p:sp>
@@ -6767,14 +6961,16 @@
         </p:nvSpPr>
         <p:spPr>
           <a:xfrm>
-            <a:off x="8432597" y="1847088"/>
+            <a:off x="8432597" y="1901952"/>
             <a:ext cx="365760" cy="365760"/>
           </a:xfrm>
           <a:prstGeom prst="rect">
             <a:avLst/>
           </a:prstGeom>
           <a:noFill/>
-          <a:ln/>
+          <a:ln>
+            <a:noFill/>
+          </a:ln>
         </p:spPr>
         <p:txBody>
           <a:bodyPr wrap="square" lIns="0" tIns="0" rIns="0" bIns="0" rtlCol="0" anchor="ctr"/>
@@ -6806,14 +7002,16 @@
         </p:nvSpPr>
         <p:spPr>
           <a:xfrm>
-            <a:off x="8889797" y="1828800"/>
+            <a:off x="8889797" y="1883664"/>
             <a:ext cx="2478938" cy="402336"/>
           </a:xfrm>
           <a:prstGeom prst="rect">
             <a:avLst/>
           </a:prstGeom>
           <a:noFill/>
-          <a:ln/>
+          <a:ln>
+            <a:noFill/>
+          </a:ln>
         </p:spPr>
         <p:txBody>
           <a:bodyPr wrap="square" lIns="0" tIns="0" rIns="0" bIns="0" rtlCol="0" anchor="ctr"/>
@@ -6845,14 +7043,16 @@
         </p:nvSpPr>
         <p:spPr>
           <a:xfrm>
-            <a:off x="8432597" y="2487168"/>
-            <a:ext cx="2936138" cy="2834640"/>
-          </a:xfrm>
-          <a:prstGeom prst="rect">
-            <a:avLst/>
-          </a:prstGeom>
-          <a:noFill/>
-          <a:ln/>
+            <a:off x="8432597" y="2542032"/>
+            <a:ext cx="2936138" cy="2011680"/>
+          </a:xfrm>
+          <a:prstGeom prst="rect">
+            <a:avLst/>
+          </a:prstGeom>
+          <a:noFill/>
+          <a:ln>
+            <a:noFill/>
+          </a:ln>
         </p:spPr>
         <p:txBody>
           <a:bodyPr wrap="square" lIns="0" tIns="0" rIns="0" bIns="0" rtlCol="0" anchor="t"/>
@@ -6971,7 +7171,9 @@
             <a:avLst/>
           </a:prstGeom>
           <a:noFill/>
-          <a:ln/>
+          <a:ln>
+            <a:noFill/>
+          </a:ln>
         </p:spPr>
         <p:txBody>
           <a:bodyPr wrap="square" lIns="0" tIns="0" rIns="0" bIns="0" rtlCol="0" anchor="ctr"/>
@@ -7010,7 +7212,9 @@
             <a:avLst/>
           </a:prstGeom>
           <a:noFill/>
-          <a:ln/>
+          <a:ln>
+            <a:noFill/>
+          </a:ln>
         </p:spPr>
         <p:txBody>
           <a:bodyPr wrap="square" lIns="0" tIns="0" rIns="0" bIns="0" rtlCol="0" anchor="t"/>
@@ -7101,7 +7305,9 @@
             <a:avLst/>
           </a:prstGeom>
           <a:noFill/>
-          <a:ln/>
+          <a:ln>
+            <a:noFill/>
+          </a:ln>
         </p:spPr>
         <p:txBody>
           <a:bodyPr wrap="square" lIns="0" tIns="0" rIns="0" bIns="0" rtlCol="0" anchor="ctr"/>
@@ -7142,7 +7348,9 @@
           <a:solidFill>
             <a:srgbClr val="E7ECF7"/>
           </a:solidFill>
-          <a:ln/>
+          <a:ln>
+            <a:noFill/>
+          </a:ln>
         </p:spPr>
       </p:sp>
       <p:sp>
@@ -7162,7 +7370,9 @@
           <a:solidFill>
             <a:srgbClr val="E7ECF7"/>
           </a:solidFill>
-          <a:ln/>
+          <a:ln>
+            <a:noFill/>
+          </a:ln>
         </p:spPr>
       </p:sp>
       <p:sp>
@@ -7182,7 +7392,9 @@
           <a:solidFill>
             <a:srgbClr val="E7ECF7"/>
           </a:solidFill>
-          <a:ln/>
+          <a:ln>
+            <a:noFill/>
+          </a:ln>
         </p:spPr>
       </p:sp>
       <p:sp>
@@ -7252,7 +7464,9 @@
             <a:avLst/>
           </a:prstGeom>
           <a:noFill/>
-          <a:ln/>
+          <a:ln>
+            <a:noFill/>
+          </a:ln>
         </p:spPr>
         <p:txBody>
           <a:bodyPr wrap="square" lIns="0" tIns="0" rIns="0" bIns="0" rtlCol="0" anchor="ctr"/>
@@ -7293,7 +7507,9 @@
           <a:solidFill>
             <a:srgbClr val="E7ECF7"/>
           </a:solidFill>
-          <a:ln/>
+          <a:ln>
+            <a:noFill/>
+          </a:ln>
         </p:spPr>
       </p:sp>
       <p:sp>
@@ -7313,7 +7529,9 @@
           <a:solidFill>
             <a:srgbClr val="E7ECF7"/>
           </a:solidFill>
-          <a:ln/>
+          <a:ln>
+            <a:noFill/>
+          </a:ln>
         </p:spPr>
       </p:sp>
       <p:sp>
@@ -7333,7 +7551,9 @@
           <a:solidFill>
             <a:srgbClr val="E7ECF7"/>
           </a:solidFill>
-          <a:ln/>
+          <a:ln>
+            <a:noFill/>
+          </a:ln>
         </p:spPr>
       </p:sp>
       <p:sp>
@@ -7403,7 +7623,9 @@
             <a:avLst/>
           </a:prstGeom>
           <a:noFill/>
-          <a:ln/>
+          <a:ln>
+            <a:noFill/>
+          </a:ln>
         </p:spPr>
         <p:txBody>
           <a:bodyPr wrap="square" lIns="0" tIns="0" rIns="0" bIns="0" rtlCol="0" anchor="ctr"/>
@@ -7444,7 +7666,9 @@
           <a:solidFill>
             <a:srgbClr val="E7ECF7"/>
           </a:solidFill>
-          <a:ln/>
+          <a:ln>
+            <a:noFill/>
+          </a:ln>
         </p:spPr>
       </p:sp>
       <p:sp>
@@ -7464,7 +7688,9 @@
           <a:solidFill>
             <a:srgbClr val="E7ECF7"/>
           </a:solidFill>
-          <a:ln/>
+          <a:ln>
+            <a:noFill/>
+          </a:ln>
         </p:spPr>
       </p:sp>
       <p:sp>
@@ -7484,7 +7710,9 @@
           <a:solidFill>
             <a:srgbClr val="E7ECF7"/>
           </a:solidFill>
-          <a:ln/>
+          <a:ln>
+            <a:noFill/>
+          </a:ln>
         </p:spPr>
       </p:sp>
       <p:sp>
@@ -7529,7 +7757,9 @@
             <a:avLst/>
           </a:prstGeom>
           <a:noFill/>
-          <a:ln/>
+          <a:ln>
+            <a:noFill/>
+          </a:ln>
         </p:spPr>
         <p:txBody>
           <a:bodyPr wrap="square" lIns="0" tIns="0" rIns="0" bIns="0" rtlCol="0" anchor="ctr"/>
@@ -7599,6 +7829,9 @@
           <a:prstGeom prst="ellipse">
             <a:avLst/>
           </a:prstGeom>
+          <a:solidFill>
+            <a:srgbClr val="0E1729"/>
+          </a:solidFill>
           <a:ln w="19050">
             <a:solidFill>
               <a:srgbClr val="24365A"/>
@@ -7621,6 +7854,9 @@
           <a:prstGeom prst="ellipse">
             <a:avLst/>
           </a:prstGeom>
+          <a:solidFill>
+            <a:srgbClr val="0E1729"/>
+          </a:solidFill>
           <a:ln w="19050">
             <a:solidFill>
               <a:srgbClr val="3563E9"/>
@@ -7646,7 +7882,9 @@
           <a:solidFill>
             <a:srgbClr val="FFB020"/>
           </a:solidFill>
-          <a:ln/>
+          <a:ln>
+            <a:noFill/>
+          </a:ln>
         </p:spPr>
       </p:sp>
       <p:sp>
@@ -7664,7 +7902,9 @@
             <a:avLst/>
           </a:prstGeom>
           <a:noFill/>
-          <a:ln/>
+          <a:ln>
+            <a:noFill/>
+          </a:ln>
         </p:spPr>
         <p:txBody>
           <a:bodyPr wrap="square" lIns="0" tIns="0" rIns="0" bIns="0" rtlCol="0" anchor="t"/>
@@ -7703,7 +7943,9 @@
             <a:avLst/>
           </a:prstGeom>
           <a:noFill/>
-          <a:ln/>
+          <a:ln>
+            <a:noFill/>
+          </a:ln>
         </p:spPr>
         <p:txBody>
           <a:bodyPr wrap="square" lIns="0" tIns="0" rIns="0" bIns="0" rtlCol="0" anchor="t"/>
@@ -7742,7 +7984,9 @@
             <a:avLst/>
           </a:prstGeom>
           <a:noFill/>
-          <a:ln/>
+          <a:ln>
+            <a:noFill/>
+          </a:ln>
         </p:spPr>
         <p:txBody>
           <a:bodyPr wrap="square" lIns="0" tIns="0" rIns="0" bIns="0" rtlCol="0" anchor="t"/>
@@ -7811,7 +8055,9 @@
             <a:avLst/>
           </a:prstGeom>
           <a:noFill/>
-          <a:ln/>
+          <a:ln>
+            <a:noFill/>
+          </a:ln>
         </p:spPr>
         <p:txBody>
           <a:bodyPr wrap="square" lIns="0" tIns="0" rIns="0" bIns="0" rtlCol="0" anchor="ctr"/>
@@ -7850,7 +8096,9 @@
             <a:avLst/>
           </a:prstGeom>
           <a:noFill/>
-          <a:ln/>
+          <a:ln>
+            <a:noFill/>
+          </a:ln>
         </p:spPr>
         <p:txBody>
           <a:bodyPr wrap="square" lIns="0" tIns="0" rIns="0" bIns="0" rtlCol="0" anchor="t"/>
@@ -7919,7 +8167,9 @@
             <a:avLst/>
           </a:prstGeom>
           <a:noFill/>
-          <a:ln/>
+          <a:ln>
+            <a:noFill/>
+          </a:ln>
         </p:spPr>
         <p:txBody>
           <a:bodyPr wrap="square" lIns="0" tIns="0" rIns="0" bIns="0" rtlCol="0" anchor="ctr"/>
@@ -7958,7 +8208,9 @@
             <a:avLst/>
           </a:prstGeom>
           <a:noFill/>
-          <a:ln/>
+          <a:ln>
+            <a:noFill/>
+          </a:ln>
         </p:spPr>
         <p:txBody>
           <a:bodyPr wrap="square" lIns="0" tIns="0" rIns="0" bIns="0" rtlCol="0" anchor="t"/>
@@ -8002,7 +8254,9 @@
           <a:solidFill>
             <a:srgbClr val="FFB020"/>
           </a:solidFill>
-          <a:ln/>
+          <a:ln>
+            <a:noFill/>
+          </a:ln>
         </p:spPr>
       </p:sp>
       <p:sp>
@@ -8020,7 +8274,9 @@
             <a:avLst/>
           </a:prstGeom>
           <a:noFill/>
-          <a:ln/>
+          <a:ln>
+            <a:noFill/>
+          </a:ln>
         </p:spPr>
         <p:txBody>
           <a:bodyPr wrap="square" lIns="0" tIns="0" rIns="0" bIns="0" rtlCol="0" anchor="ctr"/>
@@ -8084,7 +8340,9 @@
             <a:avLst/>
           </a:prstGeom>
           <a:noFill/>
-          <a:ln/>
+          <a:ln>
+            <a:noFill/>
+          </a:ln>
         </p:spPr>
         <p:txBody>
           <a:bodyPr wrap="square" lIns="0" tIns="0" rIns="0" bIns="0" rtlCol="0" anchor="ctr"/>
@@ -8123,7 +8381,9 @@
             <a:avLst/>
           </a:prstGeom>
           <a:noFill/>
-          <a:ln/>
+          <a:ln>
+            <a:noFill/>
+          </a:ln>
         </p:spPr>
         <p:txBody>
           <a:bodyPr wrap="square" lIns="0" tIns="0" rIns="0" bIns="0" rtlCol="0" anchor="t"/>
@@ -8191,7 +8451,9 @@
           <a:solidFill>
             <a:srgbClr val="FFB020"/>
           </a:solidFill>
-          <a:ln/>
+          <a:ln>
+            <a:noFill/>
+          </a:ln>
         </p:spPr>
       </p:sp>
       <p:sp>
@@ -8209,7 +8471,9 @@
             <a:avLst/>
           </a:prstGeom>
           <a:noFill/>
-          <a:ln/>
+          <a:ln>
+            <a:noFill/>
+          </a:ln>
         </p:spPr>
         <p:txBody>
           <a:bodyPr wrap="square" lIns="0" tIns="0" rIns="0" bIns="0" rtlCol="0" anchor="ctr"/>
@@ -8248,7 +8512,9 @@
             <a:avLst/>
           </a:prstGeom>
           <a:noFill/>
-          <a:ln/>
+          <a:ln>
+            <a:noFill/>
+          </a:ln>
         </p:spPr>
         <p:txBody>
           <a:bodyPr wrap="square" lIns="0" tIns="0" rIns="0" bIns="0" rtlCol="0" anchor="ctr"/>
@@ -8287,7 +8553,9 @@
             <a:avLst/>
           </a:prstGeom>
           <a:noFill/>
-          <a:ln/>
+          <a:ln>
+            <a:noFill/>
+          </a:ln>
         </p:spPr>
         <p:txBody>
           <a:bodyPr wrap="square" lIns="0" tIns="0" rIns="0" bIns="0" rtlCol="0" anchor="t"/>
@@ -8358,7 +8626,9 @@
           <a:solidFill>
             <a:srgbClr val="FFB020"/>
           </a:solidFill>
-          <a:ln/>
+          <a:ln>
+            <a:noFill/>
+          </a:ln>
         </p:spPr>
       </p:sp>
       <p:sp>
@@ -8376,7 +8646,9 @@
             <a:avLst/>
           </a:prstGeom>
           <a:noFill/>
-          <a:ln/>
+          <a:ln>
+            <a:noFill/>
+          </a:ln>
         </p:spPr>
         <p:txBody>
           <a:bodyPr wrap="square" lIns="0" tIns="0" rIns="0" bIns="0" rtlCol="0" anchor="ctr"/>
@@ -8415,7 +8687,9 @@
             <a:avLst/>
           </a:prstGeom>
           <a:noFill/>
-          <a:ln/>
+          <a:ln>
+            <a:noFill/>
+          </a:ln>
         </p:spPr>
         <p:txBody>
           <a:bodyPr wrap="square" lIns="0" tIns="0" rIns="0" bIns="0" rtlCol="0" anchor="ctr"/>
@@ -8454,7 +8728,9 @@
             <a:avLst/>
           </a:prstGeom>
           <a:noFill/>
-          <a:ln/>
+          <a:ln>
+            <a:noFill/>
+          </a:ln>
         </p:spPr>
         <p:txBody>
           <a:bodyPr wrap="square" lIns="0" tIns="0" rIns="0" bIns="0" rtlCol="0" anchor="t"/>
@@ -8525,7 +8801,9 @@
           <a:solidFill>
             <a:srgbClr val="FFB020"/>
           </a:solidFill>
-          <a:ln/>
+          <a:ln>
+            <a:noFill/>
+          </a:ln>
         </p:spPr>
       </p:sp>
       <p:sp>
@@ -8543,7 +8821,9 @@
             <a:avLst/>
           </a:prstGeom>
           <a:noFill/>
-          <a:ln/>
+          <a:ln>
+            <a:noFill/>
+          </a:ln>
         </p:spPr>
         <p:txBody>
           <a:bodyPr wrap="square" lIns="0" tIns="0" rIns="0" bIns="0" rtlCol="0" anchor="ctr"/>
@@ -8582,7 +8862,9 @@
             <a:avLst/>
           </a:prstGeom>
           <a:noFill/>
-          <a:ln/>
+          <a:ln>
+            <a:noFill/>
+          </a:ln>
         </p:spPr>
         <p:txBody>
           <a:bodyPr wrap="square" lIns="0" tIns="0" rIns="0" bIns="0" rtlCol="0" anchor="ctr"/>
@@ -8621,7 +8903,9 @@
             <a:avLst/>
           </a:prstGeom>
           <a:noFill/>
-          <a:ln/>
+          <a:ln>
+            <a:noFill/>
+          </a:ln>
         </p:spPr>
         <p:txBody>
           <a:bodyPr wrap="square" lIns="0" tIns="0" rIns="0" bIns="0" rtlCol="0" anchor="t"/>
@@ -8692,7 +8976,9 @@
           <a:solidFill>
             <a:srgbClr val="FFB020"/>
           </a:solidFill>
-          <a:ln/>
+          <a:ln>
+            <a:noFill/>
+          </a:ln>
         </p:spPr>
       </p:sp>
       <p:sp>
@@ -8710,7 +8996,9 @@
             <a:avLst/>
           </a:prstGeom>
           <a:noFill/>
-          <a:ln/>
+          <a:ln>
+            <a:noFill/>
+          </a:ln>
         </p:spPr>
         <p:txBody>
           <a:bodyPr wrap="square" lIns="0" tIns="0" rIns="0" bIns="0" rtlCol="0" anchor="ctr"/>
@@ -8749,7 +9037,9 @@
             <a:avLst/>
           </a:prstGeom>
           <a:noFill/>
-          <a:ln/>
+          <a:ln>
+            <a:noFill/>
+          </a:ln>
         </p:spPr>
         <p:txBody>
           <a:bodyPr wrap="square" lIns="0" tIns="0" rIns="0" bIns="0" rtlCol="0" anchor="ctr"/>
@@ -8788,7 +9078,9 @@
             <a:avLst/>
           </a:prstGeom>
           <a:noFill/>
-          <a:ln/>
+          <a:ln>
+            <a:noFill/>
+          </a:ln>
         </p:spPr>
         <p:txBody>
           <a:bodyPr wrap="square" lIns="0" tIns="0" rIns="0" bIns="0" rtlCol="0" anchor="t"/>
@@ -8834,7 +9126,9 @@
           <a:solidFill>
             <a:srgbClr val="0E1729"/>
           </a:solidFill>
-          <a:ln/>
+          <a:ln>
+            <a:noFill/>
+          </a:ln>
         </p:spPr>
       </p:sp>
       <p:sp>
@@ -8852,7 +9146,9 @@
             <a:avLst/>
           </a:prstGeom>
           <a:noFill/>
-          <a:ln/>
+          <a:ln>
+            <a:noFill/>
+          </a:ln>
         </p:spPr>
         <p:txBody>
           <a:bodyPr wrap="square" lIns="0" tIns="0" rIns="0" bIns="0" rtlCol="0" anchor="ctr"/>
@@ -8891,7 +9187,9 @@
             <a:avLst/>
           </a:prstGeom>
           <a:noFill/>
-          <a:ln/>
+          <a:ln>
+            <a:noFill/>
+          </a:ln>
         </p:spPr>
         <p:txBody>
           <a:bodyPr wrap="square" lIns="0" tIns="0" rIns="0" bIns="0" rtlCol="0" anchor="t"/>
@@ -8930,7 +9228,9 @@
             <a:avLst/>
           </a:prstGeom>
           <a:noFill/>
-          <a:ln/>
+          <a:ln>
+            <a:noFill/>
+          </a:ln>
         </p:spPr>
         <p:txBody>
           <a:bodyPr wrap="square" lIns="0" tIns="0" rIns="0" bIns="0" rtlCol="0" anchor="ctr"/>
@@ -8969,7 +9269,9 @@
             <a:avLst/>
           </a:prstGeom>
           <a:noFill/>
-          <a:ln/>
+          <a:ln>
+            <a:noFill/>
+          </a:ln>
         </p:spPr>
         <p:txBody>
           <a:bodyPr wrap="square" lIns="0" tIns="0" rIns="0" bIns="0" rtlCol="0" anchor="t"/>
@@ -9008,7 +9310,9 @@
             <a:avLst/>
           </a:prstGeom>
           <a:noFill/>
-          <a:ln/>
+          <a:ln>
+            <a:noFill/>
+          </a:ln>
         </p:spPr>
         <p:txBody>
           <a:bodyPr wrap="square" lIns="0" tIns="0" rIns="0" bIns="0" rtlCol="0" anchor="ctr"/>
@@ -9047,7 +9351,9 @@
             <a:avLst/>
           </a:prstGeom>
           <a:noFill/>
-          <a:ln/>
+          <a:ln>
+            <a:noFill/>
+          </a:ln>
         </p:spPr>
         <p:txBody>
           <a:bodyPr wrap="square" lIns="0" tIns="0" rIns="0" bIns="0" rtlCol="0" anchor="t"/>
@@ -9111,7 +9417,9 @@
             <a:avLst/>
           </a:prstGeom>
           <a:noFill/>
-          <a:ln/>
+          <a:ln>
+            <a:noFill/>
+          </a:ln>
         </p:spPr>
         <p:txBody>
           <a:bodyPr wrap="square" lIns="0" tIns="0" rIns="0" bIns="0" rtlCol="0" anchor="ctr"/>
@@ -9150,7 +9458,9 @@
             <a:avLst/>
           </a:prstGeom>
           <a:noFill/>
-          <a:ln/>
+          <a:ln>
+            <a:noFill/>
+          </a:ln>
         </p:spPr>
         <p:txBody>
           <a:bodyPr wrap="square" lIns="0" tIns="0" rIns="0" bIns="0" rtlCol="0" anchor="t"/>
@@ -9189,7 +9499,9 @@
             <a:avLst/>
           </a:prstGeom>
           <a:noFill/>
-          <a:ln/>
+          <a:ln>
+            <a:noFill/>
+          </a:ln>
         </p:spPr>
         <p:txBody>
           <a:bodyPr wrap="square" lIns="0" tIns="0" rIns="0" bIns="0" rtlCol="0" anchor="t"/>
@@ -9260,7 +9572,9 @@
           <a:solidFill>
             <a:srgbClr val="FFB020"/>
           </a:solidFill>
-          <a:ln/>
+          <a:ln>
+            <a:noFill/>
+          </a:ln>
         </p:spPr>
       </p:sp>
       <p:sp>
@@ -9278,7 +9592,9 @@
             <a:avLst/>
           </a:prstGeom>
           <a:noFill/>
-          <a:ln/>
+          <a:ln>
+            <a:noFill/>
+          </a:ln>
         </p:spPr>
         <p:txBody>
           <a:bodyPr wrap="square" lIns="0" tIns="0" rIns="0" bIns="0" rtlCol="0" anchor="ctr"/>
@@ -9317,7 +9633,9 @@
             <a:avLst/>
           </a:prstGeom>
           <a:noFill/>
-          <a:ln/>
+          <a:ln>
+            <a:noFill/>
+          </a:ln>
         </p:spPr>
         <p:txBody>
           <a:bodyPr wrap="square" lIns="0" tIns="0" rIns="0" bIns="0" rtlCol="0" anchor="t"/>
@@ -9388,7 +9706,9 @@
           <a:solidFill>
             <a:srgbClr val="FFB020"/>
           </a:solidFill>
-          <a:ln/>
+          <a:ln>
+            <a:noFill/>
+          </a:ln>
         </p:spPr>
       </p:sp>
       <p:sp>
@@ -9406,7 +9726,9 @@
             <a:avLst/>
           </a:prstGeom>
           <a:noFill/>
-          <a:ln/>
+          <a:ln>
+            <a:noFill/>
+          </a:ln>
         </p:spPr>
         <p:txBody>
           <a:bodyPr wrap="square" lIns="0" tIns="0" rIns="0" bIns="0" rtlCol="0" anchor="ctr"/>
@@ -9445,7 +9767,9 @@
             <a:avLst/>
           </a:prstGeom>
           <a:noFill/>
-          <a:ln/>
+          <a:ln>
+            <a:noFill/>
+          </a:ln>
         </p:spPr>
         <p:txBody>
           <a:bodyPr wrap="square" lIns="0" tIns="0" rIns="0" bIns="0" rtlCol="0" anchor="t"/>
@@ -9516,7 +9840,9 @@
           <a:solidFill>
             <a:srgbClr val="FFB020"/>
           </a:solidFill>
-          <a:ln/>
+          <a:ln>
+            <a:noFill/>
+          </a:ln>
         </p:spPr>
       </p:sp>
       <p:sp>
@@ -9534,7 +9860,9 @@
             <a:avLst/>
           </a:prstGeom>
           <a:noFill/>
-          <a:ln/>
+          <a:ln>
+            <a:noFill/>
+          </a:ln>
         </p:spPr>
         <p:txBody>
           <a:bodyPr wrap="square" lIns="0" tIns="0" rIns="0" bIns="0" rtlCol="0" anchor="ctr"/>
@@ -9573,7 +9901,9 @@
             <a:avLst/>
           </a:prstGeom>
           <a:noFill/>
-          <a:ln/>
+          <a:ln>
+            <a:noFill/>
+          </a:ln>
         </p:spPr>
         <p:txBody>
           <a:bodyPr wrap="square" lIns="0" tIns="0" rIns="0" bIns="0" rtlCol="0" anchor="t"/>
@@ -9644,7 +9974,9 @@
           <a:solidFill>
             <a:srgbClr val="FFB020"/>
           </a:solidFill>
-          <a:ln/>
+          <a:ln>
+            <a:noFill/>
+          </a:ln>
         </p:spPr>
       </p:sp>
       <p:sp>
@@ -9662,7 +9994,9 @@
             <a:avLst/>
           </a:prstGeom>
           <a:noFill/>
-          <a:ln/>
+          <a:ln>
+            <a:noFill/>
+          </a:ln>
         </p:spPr>
         <p:txBody>
           <a:bodyPr wrap="square" lIns="0" tIns="0" rIns="0" bIns="0" rtlCol="0" anchor="ctr"/>
@@ -9701,7 +10035,9 @@
             <a:avLst/>
           </a:prstGeom>
           <a:noFill/>
-          <a:ln/>
+          <a:ln>
+            <a:noFill/>
+          </a:ln>
         </p:spPr>
         <p:txBody>
           <a:bodyPr wrap="square" lIns="0" tIns="0" rIns="0" bIns="0" rtlCol="0" anchor="t"/>
@@ -9772,7 +10108,9 @@
           <a:solidFill>
             <a:srgbClr val="FFB020"/>
           </a:solidFill>
-          <a:ln/>
+          <a:ln>
+            <a:noFill/>
+          </a:ln>
         </p:spPr>
       </p:sp>
       <p:sp>
@@ -9790,7 +10128,9 @@
             <a:avLst/>
           </a:prstGeom>
           <a:noFill/>
-          <a:ln/>
+          <a:ln>
+            <a:noFill/>
+          </a:ln>
         </p:spPr>
         <p:txBody>
           <a:bodyPr wrap="square" lIns="0" tIns="0" rIns="0" bIns="0" rtlCol="0" anchor="ctr"/>
@@ -9829,7 +10169,9 @@
             <a:avLst/>
           </a:prstGeom>
           <a:noFill/>
-          <a:ln/>
+          <a:ln>
+            <a:noFill/>
+          </a:ln>
         </p:spPr>
         <p:txBody>
           <a:bodyPr wrap="square" lIns="0" tIns="0" rIns="0" bIns="0" rtlCol="0" anchor="t"/>
@@ -9900,7 +10242,9 @@
           <a:solidFill>
             <a:srgbClr val="FFB020"/>
           </a:solidFill>
-          <a:ln/>
+          <a:ln>
+            <a:noFill/>
+          </a:ln>
         </p:spPr>
       </p:sp>
       <p:sp>
@@ -9918,7 +10262,9 @@
             <a:avLst/>
           </a:prstGeom>
           <a:noFill/>
-          <a:ln/>
+          <a:ln>
+            <a:noFill/>
+          </a:ln>
         </p:spPr>
         <p:txBody>
           <a:bodyPr wrap="square" lIns="0" tIns="0" rIns="0" bIns="0" rtlCol="0" anchor="ctr"/>
@@ -9957,7 +10303,9 @@
             <a:avLst/>
           </a:prstGeom>
           <a:noFill/>
-          <a:ln/>
+          <a:ln>
+            <a:noFill/>
+          </a:ln>
         </p:spPr>
         <p:txBody>
           <a:bodyPr wrap="square" lIns="0" tIns="0" rIns="0" bIns="0" rtlCol="0" anchor="t"/>
@@ -10024,7 +10372,9 @@
             <a:avLst/>
           </a:prstGeom>
           <a:noFill/>
-          <a:ln/>
+          <a:ln>
+            <a:noFill/>
+          </a:ln>
         </p:spPr>
         <p:txBody>
           <a:bodyPr wrap="square" lIns="0" tIns="0" rIns="0" bIns="0" rtlCol="0" anchor="ctr"/>
@@ -10063,7 +10413,9 @@
             <a:avLst/>
           </a:prstGeom>
           <a:noFill/>
-          <a:ln/>
+          <a:ln>
+            <a:noFill/>
+          </a:ln>
         </p:spPr>
         <p:txBody>
           <a:bodyPr wrap="square" lIns="0" tIns="0" rIns="0" bIns="0" rtlCol="0" anchor="t"/>
@@ -10102,7 +10454,9 @@
             <a:avLst/>
           </a:prstGeom>
           <a:noFill/>
-          <a:ln/>
+          <a:ln>
+            <a:noFill/>
+          </a:ln>
         </p:spPr>
         <p:txBody>
           <a:bodyPr wrap="square" lIns="0" tIns="0" rIns="0" bIns="0" rtlCol="0" anchor="t"/>
@@ -10173,7 +10527,9 @@
           <a:solidFill>
             <a:srgbClr val="FFB020"/>
           </a:solidFill>
-          <a:ln/>
+          <a:ln>
+            <a:noFill/>
+          </a:ln>
         </p:spPr>
       </p:sp>
       <p:sp>
@@ -10191,7 +10547,9 @@
             <a:avLst/>
           </a:prstGeom>
           <a:noFill/>
-          <a:ln/>
+          <a:ln>
+            <a:noFill/>
+          </a:ln>
         </p:spPr>
         <p:txBody>
           <a:bodyPr wrap="square" lIns="0" tIns="0" rIns="0" bIns="0" rtlCol="0" anchor="ctr"/>
@@ -10230,7 +10588,9 @@
             <a:avLst/>
           </a:prstGeom>
           <a:noFill/>
-          <a:ln/>
+          <a:ln>
+            <a:noFill/>
+          </a:ln>
         </p:spPr>
         <p:txBody>
           <a:bodyPr wrap="square" lIns="0" tIns="0" rIns="0" bIns="0" rtlCol="0" anchor="ctr"/>
@@ -10269,7 +10629,9 @@
             <a:avLst/>
           </a:prstGeom>
           <a:noFill/>
-          <a:ln/>
+          <a:ln>
+            <a:noFill/>
+          </a:ln>
         </p:spPr>
         <p:txBody>
           <a:bodyPr wrap="square" lIns="0" tIns="0" rIns="0" bIns="0" rtlCol="0" anchor="t"/>
@@ -10340,7 +10702,9 @@
           <a:solidFill>
             <a:srgbClr val="FFB020"/>
           </a:solidFill>
-          <a:ln/>
+          <a:ln>
+            <a:noFill/>
+          </a:ln>
         </p:spPr>
       </p:sp>
       <p:sp>
@@ -10358,7 +10722,9 @@
             <a:avLst/>
           </a:prstGeom>
           <a:noFill/>
-          <a:ln/>
+          <a:ln>
+            <a:noFill/>
+          </a:ln>
         </p:spPr>
         <p:txBody>
           <a:bodyPr wrap="square" lIns="0" tIns="0" rIns="0" bIns="0" rtlCol="0" anchor="ctr"/>
@@ -10397,7 +10763,9 @@
             <a:avLst/>
           </a:prstGeom>
           <a:noFill/>
-          <a:ln/>
+          <a:ln>
+            <a:noFill/>
+          </a:ln>
         </p:spPr>
         <p:txBody>
           <a:bodyPr wrap="square" lIns="0" tIns="0" rIns="0" bIns="0" rtlCol="0" anchor="ctr"/>
@@ -10436,7 +10804,9 @@
             <a:avLst/>
           </a:prstGeom>
           <a:noFill/>
-          <a:ln/>
+          <a:ln>
+            <a:noFill/>
+          </a:ln>
         </p:spPr>
         <p:txBody>
           <a:bodyPr wrap="square" lIns="0" tIns="0" rIns="0" bIns="0" rtlCol="0" anchor="t"/>
@@ -10507,7 +10877,9 @@
           <a:solidFill>
             <a:srgbClr val="FFB020"/>
           </a:solidFill>
-          <a:ln/>
+          <a:ln>
+            <a:noFill/>
+          </a:ln>
         </p:spPr>
       </p:sp>
       <p:sp>
@@ -10525,7 +10897,9 @@
             <a:avLst/>
           </a:prstGeom>
           <a:noFill/>
-          <a:ln/>
+          <a:ln>
+            <a:noFill/>
+          </a:ln>
         </p:spPr>
         <p:txBody>
           <a:bodyPr wrap="square" lIns="0" tIns="0" rIns="0" bIns="0" rtlCol="0" anchor="ctr"/>
@@ -10564,7 +10938,9 @@
             <a:avLst/>
           </a:prstGeom>
           <a:noFill/>
-          <a:ln/>
+          <a:ln>
+            <a:noFill/>
+          </a:ln>
         </p:spPr>
         <p:txBody>
           <a:bodyPr wrap="square" lIns="0" tIns="0" rIns="0" bIns="0" rtlCol="0" anchor="ctr"/>
@@ -10603,7 +10979,9 @@
             <a:avLst/>
           </a:prstGeom>
           <a:noFill/>
-          <a:ln/>
+          <a:ln>
+            <a:noFill/>
+          </a:ln>
         </p:spPr>
         <p:txBody>
           <a:bodyPr wrap="square" lIns="0" tIns="0" rIns="0" bIns="0" rtlCol="0" anchor="t"/>
@@ -10674,7 +11052,9 @@
           <a:solidFill>
             <a:srgbClr val="FFB020"/>
           </a:solidFill>
-          <a:ln/>
+          <a:ln>
+            <a:noFill/>
+          </a:ln>
         </p:spPr>
       </p:sp>
       <p:sp>
@@ -10692,7 +11072,9 @@
             <a:avLst/>
           </a:prstGeom>
           <a:noFill/>
-          <a:ln/>
+          <a:ln>
+            <a:noFill/>
+          </a:ln>
         </p:spPr>
         <p:txBody>
           <a:bodyPr wrap="square" lIns="0" tIns="0" rIns="0" bIns="0" rtlCol="0" anchor="ctr"/>
@@ -10731,7 +11113,9 @@
             <a:avLst/>
           </a:prstGeom>
           <a:noFill/>
-          <a:ln/>
+          <a:ln>
+            <a:noFill/>
+          </a:ln>
         </p:spPr>
         <p:txBody>
           <a:bodyPr wrap="square" lIns="0" tIns="0" rIns="0" bIns="0" rtlCol="0" anchor="ctr"/>
@@ -10770,7 +11154,9 @@
             <a:avLst/>
           </a:prstGeom>
           <a:noFill/>
-          <a:ln/>
+          <a:ln>
+            <a:noFill/>
+          </a:ln>
         </p:spPr>
         <p:txBody>
           <a:bodyPr wrap="square" lIns="0" tIns="0" rIns="0" bIns="0" rtlCol="0" anchor="t"/>
@@ -10841,7 +11227,9 @@
           <a:solidFill>
             <a:srgbClr val="FFB020"/>
           </a:solidFill>
-          <a:ln/>
+          <a:ln>
+            <a:noFill/>
+          </a:ln>
         </p:spPr>
       </p:sp>
       <p:sp>
@@ -10859,7 +11247,9 @@
             <a:avLst/>
           </a:prstGeom>
           <a:noFill/>
-          <a:ln/>
+          <a:ln>
+            <a:noFill/>
+          </a:ln>
         </p:spPr>
         <p:txBody>
           <a:bodyPr wrap="square" lIns="0" tIns="0" rIns="0" bIns="0" rtlCol="0" anchor="ctr"/>
@@ -10898,7 +11288,9 @@
             <a:avLst/>
           </a:prstGeom>
           <a:noFill/>
-          <a:ln/>
+          <a:ln>
+            <a:noFill/>
+          </a:ln>
         </p:spPr>
         <p:txBody>
           <a:bodyPr wrap="square" lIns="0" tIns="0" rIns="0" bIns="0" rtlCol="0" anchor="ctr"/>
@@ -10937,7 +11329,9 @@
             <a:avLst/>
           </a:prstGeom>
           <a:noFill/>
-          <a:ln/>
+          <a:ln>
+            <a:noFill/>
+          </a:ln>
         </p:spPr>
         <p:txBody>
           <a:bodyPr wrap="square" lIns="0" tIns="0" rIns="0" bIns="0" rtlCol="0" anchor="t"/>
@@ -11008,7 +11402,9 @@
           <a:solidFill>
             <a:srgbClr val="FFB020"/>
           </a:solidFill>
-          <a:ln/>
+          <a:ln>
+            <a:noFill/>
+          </a:ln>
         </p:spPr>
       </p:sp>
       <p:sp>
@@ -11026,7 +11422,9 @@
             <a:avLst/>
           </a:prstGeom>
           <a:noFill/>
-          <a:ln/>
+          <a:ln>
+            <a:noFill/>
+          </a:ln>
         </p:spPr>
         <p:txBody>
           <a:bodyPr wrap="square" lIns="0" tIns="0" rIns="0" bIns="0" rtlCol="0" anchor="ctr"/>
@@ -11065,7 +11463,9 @@
             <a:avLst/>
           </a:prstGeom>
           <a:noFill/>
-          <a:ln/>
+          <a:ln>
+            <a:noFill/>
+          </a:ln>
         </p:spPr>
         <p:txBody>
           <a:bodyPr wrap="square" lIns="0" tIns="0" rIns="0" bIns="0" rtlCol="0" anchor="ctr"/>
@@ -11104,7 +11504,9 @@
             <a:avLst/>
           </a:prstGeom>
           <a:noFill/>
-          <a:ln/>
+          <a:ln>
+            <a:noFill/>
+          </a:ln>
         </p:spPr>
         <p:txBody>
           <a:bodyPr wrap="square" lIns="0" tIns="0" rIns="0" bIns="0" rtlCol="0" anchor="t"/>
@@ -11150,7 +11552,9 @@
           <a:solidFill>
             <a:srgbClr val="0E1729"/>
           </a:solidFill>
-          <a:ln/>
+          <a:ln>
+            <a:noFill/>
+          </a:ln>
         </p:spPr>
       </p:sp>
       <p:sp>
@@ -11170,7 +11574,9 @@
           <a:solidFill>
             <a:srgbClr val="FFB020"/>
           </a:solidFill>
-          <a:ln/>
+          <a:ln>
+            <a:noFill/>
+          </a:ln>
         </p:spPr>
       </p:sp>
       <p:sp>
@@ -11188,7 +11594,9 @@
             <a:avLst/>
           </a:prstGeom>
           <a:noFill/>
-          <a:ln/>
+          <a:ln>
+            <a:noFill/>
+          </a:ln>
         </p:spPr>
         <p:txBody>
           <a:bodyPr wrap="square" lIns="0" tIns="0" rIns="0" bIns="0" rtlCol="0" anchor="ctr"/>
@@ -11255,7 +11663,9 @@
             <a:avLst/>
           </a:prstGeom>
           <a:noFill/>
-          <a:ln/>
+          <a:ln>
+            <a:noFill/>
+          </a:ln>
         </p:spPr>
         <p:txBody>
           <a:bodyPr wrap="square" lIns="0" tIns="0" rIns="0" bIns="0" rtlCol="0" anchor="ctr"/>
@@ -11294,7 +11704,9 @@
             <a:avLst/>
           </a:prstGeom>
           <a:noFill/>
-          <a:ln/>
+          <a:ln>
+            <a:noFill/>
+          </a:ln>
         </p:spPr>
         <p:txBody>
           <a:bodyPr wrap="square" lIns="0" tIns="0" rIns="0" bIns="0" rtlCol="0" anchor="t"/>
@@ -11360,7 +11772,9 @@
             <a:avLst/>
           </a:prstGeom>
           <a:noFill/>
-          <a:ln/>
+          <a:ln>
+            <a:noFill/>
+          </a:ln>
         </p:spPr>
         <p:txBody>
           <a:bodyPr wrap="square" lIns="0" tIns="0" rIns="0" bIns="0" rtlCol="0" anchor="ctr"/>
@@ -11403,7 +11817,9 @@
           <a:solidFill>
             <a:srgbClr val="FFB020"/>
           </a:solidFill>
-          <a:ln/>
+          <a:ln>
+            <a:noFill/>
+          </a:ln>
         </p:spPr>
       </p:sp>
       <p:sp>
@@ -11421,7 +11837,9 @@
             <a:avLst/>
           </a:prstGeom>
           <a:noFill/>
-          <a:ln/>
+          <a:ln>
+            <a:noFill/>
+          </a:ln>
         </p:spPr>
         <p:txBody>
           <a:bodyPr wrap="square" lIns="0" tIns="0" rIns="0" bIns="0" rtlCol="0" anchor="ctr"/>
@@ -11460,7 +11878,9 @@
             <a:avLst/>
           </a:prstGeom>
           <a:noFill/>
-          <a:ln/>
+          <a:ln>
+            <a:noFill/>
+          </a:ln>
         </p:spPr>
         <p:txBody>
           <a:bodyPr wrap="square" lIns="0" tIns="0" rIns="0" bIns="0" rtlCol="0" anchor="t"/>
@@ -11529,7 +11949,9 @@
             <a:avLst/>
           </a:prstGeom>
           <a:noFill/>
-          <a:ln/>
+          <a:ln>
+            <a:noFill/>
+          </a:ln>
         </p:spPr>
         <p:txBody>
           <a:bodyPr wrap="square" lIns="0" tIns="0" rIns="0" bIns="0" rtlCol="0" anchor="ctr"/>
@@ -11572,7 +11994,9 @@
           <a:solidFill>
             <a:srgbClr val="FFB020"/>
           </a:solidFill>
-          <a:ln/>
+          <a:ln>
+            <a:noFill/>
+          </a:ln>
         </p:spPr>
       </p:sp>
       <p:sp>
@@ -11590,7 +12014,9 @@
             <a:avLst/>
           </a:prstGeom>
           <a:noFill/>
-          <a:ln/>
+          <a:ln>
+            <a:noFill/>
+          </a:ln>
         </p:spPr>
         <p:txBody>
           <a:bodyPr wrap="square" lIns="0" tIns="0" rIns="0" bIns="0" rtlCol="0" anchor="ctr"/>
@@ -11629,7 +12055,9 @@
             <a:avLst/>
           </a:prstGeom>
           <a:noFill/>
-          <a:ln/>
+          <a:ln>
+            <a:noFill/>
+          </a:ln>
         </p:spPr>
         <p:txBody>
           <a:bodyPr wrap="square" lIns="0" tIns="0" rIns="0" bIns="0" rtlCol="0" anchor="t"/>
@@ -11698,7 +12126,9 @@
             <a:avLst/>
           </a:prstGeom>
           <a:noFill/>
-          <a:ln/>
+          <a:ln>
+            <a:noFill/>
+          </a:ln>
         </p:spPr>
         <p:txBody>
           <a:bodyPr wrap="square" lIns="0" tIns="0" rIns="0" bIns="0" rtlCol="0" anchor="ctr"/>
@@ -11741,7 +12171,9 @@
           <a:solidFill>
             <a:srgbClr val="FFB020"/>
           </a:solidFill>
-          <a:ln/>
+          <a:ln>
+            <a:noFill/>
+          </a:ln>
         </p:spPr>
       </p:sp>
       <p:sp>
@@ -11759,7 +12191,9 @@
             <a:avLst/>
           </a:prstGeom>
           <a:noFill/>
-          <a:ln/>
+          <a:ln>
+            <a:noFill/>
+          </a:ln>
         </p:spPr>
         <p:txBody>
           <a:bodyPr wrap="square" lIns="0" tIns="0" rIns="0" bIns="0" rtlCol="0" anchor="ctr"/>
@@ -11798,7 +12232,9 @@
             <a:avLst/>
           </a:prstGeom>
           <a:noFill/>
-          <a:ln/>
+          <a:ln>
+            <a:noFill/>
+          </a:ln>
         </p:spPr>
         <p:txBody>
           <a:bodyPr wrap="square" lIns="0" tIns="0" rIns="0" bIns="0" rtlCol="0" anchor="t"/>
@@ -11867,7 +12303,9 @@
             <a:avLst/>
           </a:prstGeom>
           <a:noFill/>
-          <a:ln/>
+          <a:ln>
+            <a:noFill/>
+          </a:ln>
         </p:spPr>
         <p:txBody>
           <a:bodyPr wrap="square" lIns="0" tIns="0" rIns="0" bIns="0" rtlCol="0" anchor="ctr"/>
@@ -11910,7 +12348,9 @@
           <a:solidFill>
             <a:srgbClr val="FFB020"/>
           </a:solidFill>
-          <a:ln/>
+          <a:ln>
+            <a:noFill/>
+          </a:ln>
         </p:spPr>
       </p:sp>
       <p:sp>
@@ -11928,7 +12368,9 @@
             <a:avLst/>
           </a:prstGeom>
           <a:noFill/>
-          <a:ln/>
+          <a:ln>
+            <a:noFill/>
+          </a:ln>
         </p:spPr>
         <p:txBody>
           <a:bodyPr wrap="square" lIns="0" tIns="0" rIns="0" bIns="0" rtlCol="0" anchor="ctr"/>
@@ -11967,7 +12409,9 @@
             <a:avLst/>
           </a:prstGeom>
           <a:noFill/>
-          <a:ln/>
+          <a:ln>
+            <a:noFill/>
+          </a:ln>
         </p:spPr>
         <p:txBody>
           <a:bodyPr wrap="square" lIns="0" tIns="0" rIns="0" bIns="0" rtlCol="0" anchor="t"/>
@@ -12041,7 +12485,9 @@
             <a:avLst/>
           </a:prstGeom>
           <a:noFill/>
-          <a:ln/>
+          <a:ln>
+            <a:noFill/>
+          </a:ln>
         </p:spPr>
         <p:txBody>
           <a:bodyPr wrap="square" lIns="0" tIns="0" rIns="0" bIns="0" rtlCol="0" anchor="ctr"/>
@@ -12080,7 +12526,9 @@
             <a:avLst/>
           </a:prstGeom>
           <a:noFill/>
-          <a:ln/>
+          <a:ln>
+            <a:noFill/>
+          </a:ln>
         </p:spPr>
         <p:txBody>
           <a:bodyPr wrap="square" lIns="0" tIns="0" rIns="0" bIns="0" rtlCol="0" anchor="t"/>
@@ -12119,7 +12567,9 @@
             <a:avLst/>
           </a:prstGeom>
           <a:noFill/>
-          <a:ln/>
+          <a:ln>
+            <a:noFill/>
+          </a:ln>
         </p:spPr>
         <p:txBody>
           <a:bodyPr wrap="square" lIns="0" tIns="0" rIns="0" bIns="0" rtlCol="0" anchor="t"/>
@@ -12192,7 +12642,9 @@
           <a:solidFill>
             <a:srgbClr val="24365A"/>
           </a:solidFill>
-          <a:ln/>
+          <a:ln>
+            <a:noFill/>
+          </a:ln>
         </p:spPr>
       </p:sp>
       <p:sp>
@@ -12210,7 +12662,9 @@
             <a:avLst/>
           </a:prstGeom>
           <a:noFill/>
-          <a:ln/>
+          <a:ln>
+            <a:noFill/>
+          </a:ln>
         </p:spPr>
         <p:txBody>
           <a:bodyPr wrap="square" lIns="0" tIns="0" rIns="0" bIns="0" rtlCol="0" anchor="ctr"/>
@@ -12276,7 +12730,9 @@
             <a:avLst/>
           </a:prstGeom>
           <a:noFill/>
-          <a:ln/>
+          <a:ln>
+            <a:noFill/>
+          </a:ln>
         </p:spPr>
         <p:txBody>
           <a:bodyPr wrap="square" lIns="0" tIns="0" rIns="0" bIns="0" rtlCol="0" anchor="ctr"/>
@@ -12315,7 +12771,9 @@
             <a:avLst/>
           </a:prstGeom>
           <a:noFill/>
-          <a:ln/>
+          <a:ln>
+            <a:noFill/>
+          </a:ln>
         </p:spPr>
         <p:txBody>
           <a:bodyPr wrap="square" lIns="0" tIns="0" rIns="0" bIns="0" rtlCol="0" anchor="ctr"/>
@@ -12358,7 +12816,9 @@
           <a:solidFill>
             <a:srgbClr val="3563E9"/>
           </a:solidFill>
-          <a:ln/>
+          <a:ln>
+            <a:noFill/>
+          </a:ln>
         </p:spPr>
       </p:sp>
       <p:sp>
@@ -12376,7 +12836,9 @@
             <a:avLst/>
           </a:prstGeom>
           <a:noFill/>
-          <a:ln/>
+          <a:ln>
+            <a:noFill/>
+          </a:ln>
         </p:spPr>
         <p:txBody>
           <a:bodyPr wrap="square" lIns="0" tIns="0" rIns="0" bIns="0" rtlCol="0" anchor="ctr"/>
@@ -12415,7 +12877,9 @@
             <a:avLst/>
           </a:prstGeom>
           <a:noFill/>
-          <a:ln/>
+          <a:ln>
+            <a:noFill/>
+          </a:ln>
         </p:spPr>
         <p:txBody>
           <a:bodyPr wrap="square" lIns="0" tIns="0" rIns="0" bIns="0" rtlCol="0" anchor="ctr"/>
@@ -12454,7 +12918,9 @@
             <a:avLst/>
           </a:prstGeom>
           <a:noFill/>
-          <a:ln/>
+          <a:ln>
+            <a:noFill/>
+          </a:ln>
         </p:spPr>
         <p:txBody>
           <a:bodyPr wrap="square" lIns="0" tIns="0" rIns="0" bIns="0" rtlCol="0" anchor="t"/>
@@ -12525,7 +12991,9 @@
           <a:solidFill>
             <a:srgbClr val="FFB020"/>
           </a:solidFill>
-          <a:ln/>
+          <a:ln>
+            <a:noFill/>
+          </a:ln>
         </p:spPr>
       </p:sp>
       <p:sp>
@@ -12543,7 +13011,9 @@
             <a:avLst/>
           </a:prstGeom>
           <a:noFill/>
-          <a:ln/>
+          <a:ln>
+            <a:noFill/>
+          </a:ln>
         </p:spPr>
         <p:txBody>
           <a:bodyPr wrap="square" lIns="0" tIns="0" rIns="0" bIns="0" rtlCol="0" anchor="ctr"/>
@@ -12582,7 +13052,9 @@
             <a:avLst/>
           </a:prstGeom>
           <a:noFill/>
-          <a:ln/>
+          <a:ln>
+            <a:noFill/>
+          </a:ln>
         </p:spPr>
         <p:txBody>
           <a:bodyPr wrap="square" lIns="0" tIns="0" rIns="0" bIns="0" rtlCol="0" anchor="t"/>
@@ -12725,7 +13197,9 @@
             <a:avLst/>
           </a:prstGeom>
           <a:noFill/>
-          <a:ln/>
+          <a:ln>
+            <a:noFill/>
+          </a:ln>
         </p:spPr>
         <p:txBody>
           <a:bodyPr wrap="square" lIns="0" tIns="0" rIns="0" bIns="0" rtlCol="0" anchor="ctr"/>
@@ -12764,7 +13238,9 @@
             <a:avLst/>
           </a:prstGeom>
           <a:noFill/>
-          <a:ln/>
+          <a:ln>
+            <a:noFill/>
+          </a:ln>
         </p:spPr>
         <p:txBody>
           <a:bodyPr wrap="square" lIns="0" tIns="0" rIns="0" bIns="0" rtlCol="0" anchor="t"/>
@@ -12832,7 +13308,9 @@
           <a:solidFill>
             <a:srgbClr val="FFB020"/>
           </a:solidFill>
-          <a:ln/>
+          <a:ln>
+            <a:noFill/>
+          </a:ln>
         </p:spPr>
       </p:sp>
       <p:sp>
@@ -12850,7 +13328,9 @@
             <a:avLst/>
           </a:prstGeom>
           <a:noFill/>
-          <a:ln/>
+          <a:ln>
+            <a:noFill/>
+          </a:ln>
         </p:spPr>
         <p:txBody>
           <a:bodyPr wrap="square" lIns="0" tIns="0" rIns="0" bIns="0" rtlCol="0" anchor="t"/>
@@ -12889,7 +13369,9 @@
             <a:avLst/>
           </a:prstGeom>
           <a:noFill/>
-          <a:ln/>
+          <a:ln>
+            <a:noFill/>
+          </a:ln>
         </p:spPr>
         <p:txBody>
           <a:bodyPr wrap="square" lIns="0" tIns="0" rIns="0" bIns="0" rtlCol="0" anchor="t"/>
@@ -12960,7 +13442,9 @@
           <a:solidFill>
             <a:srgbClr val="FFB020"/>
           </a:solidFill>
-          <a:ln/>
+          <a:ln>
+            <a:noFill/>
+          </a:ln>
         </p:spPr>
       </p:sp>
       <p:sp>
@@ -12978,7 +13462,9 @@
             <a:avLst/>
           </a:prstGeom>
           <a:noFill/>
-          <a:ln/>
+          <a:ln>
+            <a:noFill/>
+          </a:ln>
         </p:spPr>
         <p:txBody>
           <a:bodyPr wrap="square" lIns="0" tIns="0" rIns="0" bIns="0" rtlCol="0" anchor="t"/>
@@ -13017,7 +13503,9 @@
             <a:avLst/>
           </a:prstGeom>
           <a:noFill/>
-          <a:ln/>
+          <a:ln>
+            <a:noFill/>
+          </a:ln>
         </p:spPr>
         <p:txBody>
           <a:bodyPr wrap="square" lIns="0" tIns="0" rIns="0" bIns="0" rtlCol="0" anchor="t"/>
@@ -13088,7 +13576,9 @@
           <a:solidFill>
             <a:srgbClr val="FFB020"/>
           </a:solidFill>
-          <a:ln/>
+          <a:ln>
+            <a:noFill/>
+          </a:ln>
         </p:spPr>
       </p:sp>
       <p:sp>
@@ -13106,7 +13596,9 @@
             <a:avLst/>
           </a:prstGeom>
           <a:noFill/>
-          <a:ln/>
+          <a:ln>
+            <a:noFill/>
+          </a:ln>
         </p:spPr>
         <p:txBody>
           <a:bodyPr wrap="square" lIns="0" tIns="0" rIns="0" bIns="0" rtlCol="0" anchor="t"/>
@@ -13145,7 +13637,9 @@
             <a:avLst/>
           </a:prstGeom>
           <a:noFill/>
-          <a:ln/>
+          <a:ln>
+            <a:noFill/>
+          </a:ln>
         </p:spPr>
         <p:txBody>
           <a:bodyPr wrap="square" lIns="0" tIns="0" rIns="0" bIns="0" rtlCol="0" anchor="t"/>
@@ -13216,7 +13710,9 @@
           <a:solidFill>
             <a:srgbClr val="FFB020"/>
           </a:solidFill>
-          <a:ln/>
+          <a:ln>
+            <a:noFill/>
+          </a:ln>
         </p:spPr>
       </p:sp>
       <p:sp>
@@ -13234,7 +13730,9 @@
             <a:avLst/>
           </a:prstGeom>
           <a:noFill/>
-          <a:ln/>
+          <a:ln>
+            <a:noFill/>
+          </a:ln>
         </p:spPr>
         <p:txBody>
           <a:bodyPr wrap="square" lIns="0" tIns="0" rIns="0" bIns="0" rtlCol="0" anchor="t"/>
@@ -13273,7 +13771,9 @@
             <a:avLst/>
           </a:prstGeom>
           <a:noFill/>
-          <a:ln/>
+          <a:ln>
+            <a:noFill/>
+          </a:ln>
         </p:spPr>
         <p:txBody>
           <a:bodyPr wrap="square" lIns="0" tIns="0" rIns="0" bIns="0" rtlCol="0" anchor="t"/>
@@ -13344,7 +13844,9 @@
           <a:solidFill>
             <a:srgbClr val="FFB020"/>
           </a:solidFill>
-          <a:ln/>
+          <a:ln>
+            <a:noFill/>
+          </a:ln>
         </p:spPr>
       </p:sp>
       <p:sp>
@@ -13362,7 +13864,9 @@
             <a:avLst/>
           </a:prstGeom>
           <a:noFill/>
-          <a:ln/>
+          <a:ln>
+            <a:noFill/>
+          </a:ln>
         </p:spPr>
         <p:txBody>
           <a:bodyPr wrap="square" lIns="0" tIns="0" rIns="0" bIns="0" rtlCol="0" anchor="t"/>
@@ -13401,7 +13905,9 @@
             <a:avLst/>
           </a:prstGeom>
           <a:noFill/>
-          <a:ln/>
+          <a:ln>
+            <a:noFill/>
+          </a:ln>
         </p:spPr>
         <p:txBody>
           <a:bodyPr wrap="square" lIns="0" tIns="0" rIns="0" bIns="0" rtlCol="0" anchor="t"/>
@@ -13472,7 +13978,9 @@
           <a:solidFill>
             <a:srgbClr val="FFB020"/>
           </a:solidFill>
-          <a:ln/>
+          <a:ln>
+            <a:noFill/>
+          </a:ln>
         </p:spPr>
       </p:sp>
       <p:sp>
@@ -13490,7 +13998,9 @@
             <a:avLst/>
           </a:prstGeom>
           <a:noFill/>
-          <a:ln/>
+          <a:ln>
+            <a:noFill/>
+          </a:ln>
         </p:spPr>
         <p:txBody>
           <a:bodyPr wrap="square" lIns="0" tIns="0" rIns="0" bIns="0" rtlCol="0" anchor="t"/>
@@ -13529,7 +14039,9 @@
             <a:avLst/>
           </a:prstGeom>
           <a:noFill/>
-          <a:ln/>
+          <a:ln>
+            <a:noFill/>
+          </a:ln>
         </p:spPr>
         <p:txBody>
           <a:bodyPr wrap="square" lIns="0" tIns="0" rIns="0" bIns="0" rtlCol="0" anchor="t"/>
@@ -13600,7 +14112,9 @@
           <a:solidFill>
             <a:srgbClr val="FFB020"/>
           </a:solidFill>
-          <a:ln/>
+          <a:ln>
+            <a:noFill/>
+          </a:ln>
         </p:spPr>
       </p:sp>
       <p:sp>
@@ -13618,7 +14132,9 @@
             <a:avLst/>
           </a:prstGeom>
           <a:noFill/>
-          <a:ln/>
+          <a:ln>
+            <a:noFill/>
+          </a:ln>
         </p:spPr>
         <p:txBody>
           <a:bodyPr wrap="square" lIns="0" tIns="0" rIns="0" bIns="0" rtlCol="0" anchor="t"/>
@@ -13657,7 +14173,9 @@
             <a:avLst/>
           </a:prstGeom>
           <a:noFill/>
-          <a:ln/>
+          <a:ln>
+            <a:noFill/>
+          </a:ln>
         </p:spPr>
         <p:txBody>
           <a:bodyPr wrap="square" lIns="0" tIns="0" rIns="0" bIns="0" rtlCol="0" anchor="t"/>
@@ -13728,7 +14246,9 @@
           <a:solidFill>
             <a:srgbClr val="FFB020"/>
           </a:solidFill>
-          <a:ln/>
+          <a:ln>
+            <a:noFill/>
+          </a:ln>
         </p:spPr>
       </p:sp>
       <p:sp>
@@ -13746,7 +14266,9 @@
             <a:avLst/>
           </a:prstGeom>
           <a:noFill/>
-          <a:ln/>
+          <a:ln>
+            <a:noFill/>
+          </a:ln>
         </p:spPr>
         <p:txBody>
           <a:bodyPr wrap="square" lIns="0" tIns="0" rIns="0" bIns="0" rtlCol="0" anchor="t"/>
@@ -13785,7 +14307,9 @@
             <a:avLst/>
           </a:prstGeom>
           <a:noFill/>
-          <a:ln/>
+          <a:ln>
+            <a:noFill/>
+          </a:ln>
         </p:spPr>
         <p:txBody>
           <a:bodyPr wrap="square" lIns="0" tIns="0" rIns="0" bIns="0" rtlCol="0" anchor="t"/>
@@ -13852,7 +14376,9 @@
             <a:avLst/>
           </a:prstGeom>
           <a:noFill/>
-          <a:ln/>
+          <a:ln>
+            <a:noFill/>
+          </a:ln>
         </p:spPr>
         <p:txBody>
           <a:bodyPr wrap="square" lIns="0" tIns="0" rIns="0" bIns="0" rtlCol="0" anchor="ctr"/>
@@ -13891,7 +14417,9 @@
             <a:avLst/>
           </a:prstGeom>
           <a:noFill/>
-          <a:ln/>
+          <a:ln>
+            <a:noFill/>
+          </a:ln>
         </p:spPr>
         <p:txBody>
           <a:bodyPr wrap="square" lIns="0" tIns="0" rIns="0" bIns="0" rtlCol="0" anchor="t"/>
@@ -13930,7 +14458,9 @@
             <a:avLst/>
           </a:prstGeom>
           <a:noFill/>
-          <a:ln/>
+          <a:ln>
+            <a:noFill/>
+          </a:ln>
         </p:spPr>
         <p:txBody>
           <a:bodyPr wrap="square" lIns="0" tIns="0" rIns="0" bIns="0" rtlCol="0" anchor="t"/>
@@ -13999,7 +14529,9 @@
             <a:avLst/>
           </a:prstGeom>
           <a:noFill/>
-          <a:ln/>
+          <a:ln>
+            <a:noFill/>
+          </a:ln>
         </p:spPr>
         <p:txBody>
           <a:bodyPr wrap="square" lIns="0" tIns="0" rIns="0" bIns="0" rtlCol="0" anchor="ctr"/>
@@ -14038,7 +14570,9 @@
             <a:avLst/>
           </a:prstGeom>
           <a:noFill/>
-          <a:ln/>
+          <a:ln>
+            <a:noFill/>
+          </a:ln>
         </p:spPr>
         <p:txBody>
           <a:bodyPr wrap="square" lIns="0" tIns="0" rIns="0" bIns="0" rtlCol="0" anchor="ctr"/>
@@ -14107,7 +14641,9 @@
             <a:avLst/>
           </a:prstGeom>
           <a:noFill/>
-          <a:ln/>
+          <a:ln>
+            <a:noFill/>
+          </a:ln>
         </p:spPr>
         <p:txBody>
           <a:bodyPr wrap="square" lIns="0" tIns="0" rIns="0" bIns="0" rtlCol="0" anchor="ctr"/>
@@ -14146,7 +14682,9 @@
             <a:avLst/>
           </a:prstGeom>
           <a:noFill/>
-          <a:ln/>
+          <a:ln>
+            <a:noFill/>
+          </a:ln>
         </p:spPr>
         <p:txBody>
           <a:bodyPr wrap="square" lIns="0" tIns="0" rIns="0" bIns="0" rtlCol="0" anchor="ctr"/>
@@ -14192,7 +14730,9 @@
           <a:solidFill>
             <a:srgbClr val="0E1729"/>
           </a:solidFill>
-          <a:ln/>
+          <a:ln>
+            <a:noFill/>
+          </a:ln>
         </p:spPr>
       </p:sp>
       <p:sp>
@@ -14210,7 +14750,9 @@
             <a:avLst/>
           </a:prstGeom>
           <a:noFill/>
-          <a:ln/>
+          <a:ln>
+            <a:noFill/>
+          </a:ln>
         </p:spPr>
         <p:txBody>
           <a:bodyPr wrap="square" lIns="0" tIns="0" rIns="0" bIns="0" rtlCol="0" anchor="ctr"/>
@@ -14249,7 +14791,9 @@
             <a:avLst/>
           </a:prstGeom>
           <a:noFill/>
-          <a:ln/>
+          <a:ln>
+            <a:noFill/>
+          </a:ln>
         </p:spPr>
         <p:txBody>
           <a:bodyPr wrap="square" lIns="0" tIns="0" rIns="0" bIns="0" rtlCol="0" anchor="ctr"/>
@@ -14295,7 +14839,9 @@
           <a:solidFill>
             <a:srgbClr val="0E1729"/>
           </a:solidFill>
-          <a:ln/>
+          <a:ln>
+            <a:noFill/>
+          </a:ln>
         </p:spPr>
       </p:sp>
       <p:sp>
@@ -14313,7 +14859,9 @@
             <a:avLst/>
           </a:prstGeom>
           <a:noFill/>
-          <a:ln/>
+          <a:ln>
+            <a:noFill/>
+          </a:ln>
         </p:spPr>
         <p:txBody>
           <a:bodyPr wrap="square" lIns="0" tIns="0" rIns="0" bIns="0" rtlCol="0" anchor="ctr"/>
@@ -14352,7 +14900,9 @@
             <a:avLst/>
           </a:prstGeom>
           <a:noFill/>
-          <a:ln/>
+          <a:ln>
+            <a:noFill/>
+          </a:ln>
         </p:spPr>
         <p:txBody>
           <a:bodyPr wrap="square" lIns="0" tIns="0" rIns="0" bIns="0" rtlCol="0" anchor="ctr"/>
@@ -14421,7 +14971,9 @@
             <a:avLst/>
           </a:prstGeom>
           <a:noFill/>
-          <a:ln/>
+          <a:ln>
+            <a:noFill/>
+          </a:ln>
         </p:spPr>
         <p:txBody>
           <a:bodyPr wrap="square" lIns="0" tIns="0" rIns="0" bIns="0" rtlCol="0" anchor="ctr"/>
@@ -14460,7 +15012,9 @@
             <a:avLst/>
           </a:prstGeom>
           <a:noFill/>
-          <a:ln/>
+          <a:ln>
+            <a:noFill/>
+          </a:ln>
         </p:spPr>
         <p:txBody>
           <a:bodyPr wrap="square" lIns="0" tIns="0" rIns="0" bIns="0" rtlCol="0" anchor="ctr"/>
@@ -14506,7 +15060,9 @@
           <a:solidFill>
             <a:srgbClr val="0E1729"/>
           </a:solidFill>
-          <a:ln/>
+          <a:ln>
+            <a:noFill/>
+          </a:ln>
         </p:spPr>
       </p:sp>
       <p:sp>
@@ -14526,7 +15082,9 @@
           <a:solidFill>
             <a:srgbClr val="FFB020"/>
           </a:solidFill>
-          <a:ln/>
+          <a:ln>
+            <a:noFill/>
+          </a:ln>
         </p:spPr>
       </p:sp>
       <p:sp>
@@ -14544,7 +15102,9 @@
             <a:avLst/>
           </a:prstGeom>
           <a:noFill/>
-          <a:ln/>
+          <a:ln>
+            <a:noFill/>
+          </a:ln>
         </p:spPr>
         <p:txBody>
           <a:bodyPr wrap="square" lIns="0" tIns="0" rIns="0" bIns="0" rtlCol="0" anchor="ctr"/>
@@ -14583,7 +15143,9 @@
             <a:avLst/>
           </a:prstGeom>
           <a:noFill/>
-          <a:ln/>
+          <a:ln>
+            <a:noFill/>
+          </a:ln>
         </p:spPr>
         <p:txBody>
           <a:bodyPr wrap="square" lIns="0" tIns="0" rIns="0" bIns="0" rtlCol="0" anchor="t"/>
@@ -14757,7 +15319,9 @@
             <a:avLst/>
           </a:prstGeom>
           <a:noFill/>
-          <a:ln/>
+          <a:ln>
+            <a:noFill/>
+          </a:ln>
         </p:spPr>
         <p:txBody>
           <a:bodyPr wrap="square" lIns="0" tIns="0" rIns="0" bIns="0" rtlCol="0" anchor="ctr"/>
@@ -14796,7 +15360,9 @@
             <a:avLst/>
           </a:prstGeom>
           <a:noFill/>
-          <a:ln/>
+          <a:ln>
+            <a:noFill/>
+          </a:ln>
         </p:spPr>
         <p:txBody>
           <a:bodyPr wrap="square" lIns="0" tIns="0" rIns="0" bIns="0" rtlCol="0" anchor="t"/>
@@ -14862,7 +15428,9 @@
             <a:avLst/>
           </a:prstGeom>
           <a:noFill/>
-          <a:ln/>
+          <a:ln>
+            <a:noFill/>
+          </a:ln>
         </p:spPr>
         <p:txBody>
           <a:bodyPr wrap="square" lIns="0" tIns="0" rIns="0" bIns="0" rtlCol="0" anchor="ctr"/>
@@ -14901,7 +15469,9 @@
             <a:avLst/>
           </a:prstGeom>
           <a:noFill/>
-          <a:ln/>
+          <a:ln>
+            <a:noFill/>
+          </a:ln>
         </p:spPr>
         <p:txBody>
           <a:bodyPr wrap="square" lIns="0" tIns="0" rIns="0" bIns="0" rtlCol="0" anchor="t"/>
@@ -14970,7 +15540,9 @@
             <a:avLst/>
           </a:prstGeom>
           <a:noFill/>
-          <a:ln/>
+          <a:ln>
+            <a:noFill/>
+          </a:ln>
         </p:spPr>
         <p:txBody>
           <a:bodyPr wrap="square" lIns="0" tIns="0" rIns="0" bIns="0" rtlCol="0" anchor="ctr"/>
@@ -15009,7 +15581,9 @@
             <a:avLst/>
           </a:prstGeom>
           <a:noFill/>
-          <a:ln/>
+          <a:ln>
+            <a:noFill/>
+          </a:ln>
         </p:spPr>
         <p:txBody>
           <a:bodyPr wrap="square" lIns="0" tIns="0" rIns="0" bIns="0" rtlCol="0" anchor="t"/>
@@ -15078,7 +15652,9 @@
             <a:avLst/>
           </a:prstGeom>
           <a:noFill/>
-          <a:ln/>
+          <a:ln>
+            <a:noFill/>
+          </a:ln>
         </p:spPr>
         <p:txBody>
           <a:bodyPr wrap="square" lIns="0" tIns="0" rIns="0" bIns="0" rtlCol="0" anchor="ctr"/>
@@ -15117,7 +15693,9 @@
             <a:avLst/>
           </a:prstGeom>
           <a:noFill/>
-          <a:ln/>
+          <a:ln>
+            <a:noFill/>
+          </a:ln>
         </p:spPr>
         <p:txBody>
           <a:bodyPr wrap="square" lIns="0" tIns="0" rIns="0" bIns="0" rtlCol="0" anchor="t"/>
@@ -15186,7 +15764,9 @@
             <a:avLst/>
           </a:prstGeom>
           <a:noFill/>
-          <a:ln/>
+          <a:ln>
+            <a:noFill/>
+          </a:ln>
         </p:spPr>
         <p:txBody>
           <a:bodyPr wrap="square" lIns="0" tIns="0" rIns="0" bIns="0" rtlCol="0" anchor="ctr"/>
@@ -15225,7 +15805,9 @@
             <a:avLst/>
           </a:prstGeom>
           <a:noFill/>
-          <a:ln/>
+          <a:ln>
+            <a:noFill/>
+          </a:ln>
         </p:spPr>
         <p:txBody>
           <a:bodyPr wrap="square" lIns="0" tIns="0" rIns="0" bIns="0" rtlCol="0" anchor="t"/>
@@ -15294,7 +15876,9 @@
             <a:avLst/>
           </a:prstGeom>
           <a:noFill/>
-          <a:ln/>
+          <a:ln>
+            <a:noFill/>
+          </a:ln>
         </p:spPr>
         <p:txBody>
           <a:bodyPr wrap="square" lIns="0" tIns="0" rIns="0" bIns="0" rtlCol="0" anchor="ctr"/>
@@ -15333,7 +15917,9 @@
             <a:avLst/>
           </a:prstGeom>
           <a:noFill/>
-          <a:ln/>
+          <a:ln>
+            <a:noFill/>
+          </a:ln>
         </p:spPr>
         <p:txBody>
           <a:bodyPr wrap="square" lIns="0" tIns="0" rIns="0" bIns="0" rtlCol="0" anchor="t"/>
@@ -15402,7 +15988,9 @@
             <a:avLst/>
           </a:prstGeom>
           <a:noFill/>
-          <a:ln/>
+          <a:ln>
+            <a:noFill/>
+          </a:ln>
         </p:spPr>
         <p:txBody>
           <a:bodyPr wrap="square" lIns="0" tIns="0" rIns="0" bIns="0" rtlCol="0" anchor="ctr"/>
@@ -15441,7 +16029,9 @@
             <a:avLst/>
           </a:prstGeom>
           <a:noFill/>
-          <a:ln/>
+          <a:ln>
+            <a:noFill/>
+          </a:ln>
         </p:spPr>
         <p:txBody>
           <a:bodyPr wrap="square" lIns="0" tIns="0" rIns="0" bIns="0" rtlCol="0" anchor="t"/>
@@ -15483,7 +16073,9 @@
             <a:avLst/>
           </a:prstGeom>
           <a:noFill/>
-          <a:ln/>
+          <a:ln>
+            <a:noFill/>
+          </a:ln>
         </p:spPr>
         <p:txBody>
           <a:bodyPr wrap="square" lIns="0" tIns="0" rIns="0" bIns="0" rtlCol="0" anchor="ctr"/>
